--- a/deixis_analysis_pipeline/yoruba_cross_linguistic_analysis/Yoruba_Deixis_Presentation.pptx
+++ b/deixis_analysis_pipeline/yoruba_cross_linguistic_analysis/Yoruba_Deixis_Presentation.pptx
@@ -3124,7 +3124,7 @@
         <p:spPr>
           <a:xfrm>
             <a:off x="731520" y="2103120"/>
-            <a:ext cx="10698480" cy="2377440"/>
+            <a:ext cx="10698480" cy="2560320"/>
           </a:xfrm>
           <a:prstGeom prst="rect">
             <a:avLst/>
@@ -3161,7 +3161,7 @@
                 </a:solidFill>
                 <a:latin typeface="Calibri"/>
               </a:rPr>
-              <a:t>Deixis, mo / èmi, and moral reasoning in LLMs — English vs Yoruba</a:t>
+              <a:t>Deixis, mo / èmi, and moral reasoning in LLMs — English vs Yoruba (open prompts)</a:t>
             </a:r>
           </a:p>
         </p:txBody>
@@ -3196,7 +3196,7 @@
                 </a:solidFill>
                 <a:latin typeface="Calibri"/>
               </a:rPr>
-              <a:t>4 models (GPT-4o · Claude · DeepSeek · N-ATLaS) · 6 dilemmas · 9 deictic framings</a:t>
+              <a:t>4 models (GPT-4o · Claude · DeepSeek · N-ATLaS) · 6 dilemmas · 9 deictic framings · open arm only</a:t>
             </a:r>
           </a:p>
         </p:txBody>
@@ -3251,7 +3251,7 @@
           <a:p>
             <a:pPr algn="l"/>
             <a:r>
-              <a:rPr sz="3000" b="1" i="0">
+              <a:rPr sz="2900" b="1" i="0">
                 <a:solidFill>
                   <a:srgbClr val="1D3A5F"/>
                 </a:solidFill>
@@ -3329,7 +3329,7 @@
           <a:p>
             <a:pPr algn="l">
               <a:spcAft>
-                <a:spcPts val="1000"/>
+                <a:spcPts val="900"/>
               </a:spcAft>
             </a:pPr>
             <a:r>
@@ -3345,7 +3345,7 @@
           <a:p>
             <a:pPr algn="l">
               <a:spcAft>
-                <a:spcPts val="1000"/>
+                <a:spcPts val="900"/>
               </a:spcAft>
             </a:pPr>
             <a:r>
@@ -3361,7 +3361,7 @@
           <a:p>
             <a:pPr algn="l">
               <a:spcAft>
-                <a:spcPts val="1000"/>
+                <a:spcPts val="900"/>
               </a:spcAft>
             </a:pPr>
             <a:r>
@@ -3371,13 +3371,13 @@
                 </a:solidFill>
                 <a:latin typeface="Calibri"/>
               </a:rPr>
-              <a:t>Named (non-"mixed") ethical stance: Yoruba 53% vs English 17%  (p &lt; 0.001).</a:t>
+              <a:t>Named (non-"mixed") ethical stance: Yoruba 44% vs English 12%  (z=6.3, p &lt; 0.001).</a:t>
             </a:r>
           </a:p>
           <a:p>
             <a:pPr algn="l">
               <a:spcAft>
-                <a:spcPts val="1000"/>
+                <a:spcPts val="900"/>
               </a:spcAft>
             </a:pPr>
             <a:r>
@@ -3442,13 +3442,13 @@
           <a:p>
             <a:pPr algn="l"/>
             <a:r>
-              <a:rPr sz="2800" b="1" i="0">
+              <a:rPr sz="2700" b="1" i="0">
                 <a:solidFill>
                   <a:srgbClr val="1D3A5F"/>
                 </a:solidFill>
                 <a:latin typeface="Calibri"/>
               </a:rPr>
-              <a:t>The centerpiece — mo vs èmi marks commitment</a:t>
+              <a:t>The mo / èmi lever — and how models use it</a:t>
             </a:r>
           </a:p>
         </p:txBody>
@@ -3498,7 +3498,7 @@
       </p:sp>
       <p:pic>
         <p:nvPicPr>
-          <p:cNvPr id="4" name="Picture 3" descr="42_emphatic_committed_vs_hedged.png"/>
+          <p:cNvPr id="4" name="Picture 3" descr="16_mi_emi_mo_four_model_framing.png"/>
           <p:cNvPicPr>
             <a:picLocks noChangeAspect="1"/>
           </p:cNvPicPr>
@@ -3512,8 +3512,8 @@
         </p:blipFill>
         <p:spPr>
           <a:xfrm>
-            <a:off x="1280160" y="1417320"/>
-            <a:ext cx="5281754" cy="4480560"/>
+            <a:off x="472287" y="1417320"/>
+            <a:ext cx="11247120" cy="4434840"/>
           </a:xfrm>
           <a:prstGeom prst="rect">
             <a:avLst/>
@@ -3528,8 +3528,8 @@
         </p:nvSpPr>
         <p:spPr>
           <a:xfrm>
-            <a:off x="731520" y="6126480"/>
-            <a:ext cx="10698480" cy="548640"/>
+            <a:off x="640080" y="6080760"/>
+            <a:ext cx="10972800" cy="640080"/>
           </a:xfrm>
           <a:prstGeom prst="rect">
             <a:avLst/>
@@ -3544,13 +3544,13 @@
           <a:p>
             <a:pPr algn="ctr"/>
             <a:r>
-              <a:rPr sz="1300" b="0" i="1">
+              <a:rPr sz="1250" b="0" i="1">
                 <a:solidFill>
                   <a:srgbClr val="555555"/>
                 </a:solidFill>
                 <a:latin typeface="Calibri"/>
               </a:rPr>
-              <a:t>Emphatic ratio èmi/(mo+èmi) is higher where the model takes a stance: 0.22 committed vs 0.13 hedged (Mann–Whitney p=0.022). èmi = avowal; mo = deliberation.</a:t>
+              <a:t>Corrected emphatic ratio gradient (open): Claude 0.32 &gt; GPT-4o 0.18 &gt; DeepSeek 0.07 ≈ N-ATLaS 0.07. Within Yoruba, èmi is only marginally elevated in committed responses (p=0.058) — commitment is often carried by mo + decision verbs (mo yàn, mo pinnu).</a:t>
             </a:r>
           </a:p>
         </p:txBody>
@@ -3605,13 +3605,13 @@
           <a:p>
             <a:pPr algn="l"/>
             <a:r>
-              <a:rPr sz="3000" b="1" i="0">
+              <a:rPr sz="2900" b="1" i="0">
                 <a:solidFill>
                   <a:srgbClr val="1D3A5F"/>
                 </a:solidFill>
                 <a:latin typeface="Calibri"/>
               </a:rPr>
-              <a:t>Example — one dilemma, five frames, FIVE ethics</a:t>
+              <a:t>Example — one dilemma, five frames (open, Claude, Yorùbá whistleblower)</a:t>
             </a:r>
           </a:p>
         </p:txBody>
@@ -3683,7 +3683,7 @@
           <a:p>
             <a:pPr algn="l">
               <a:spcAft>
-                <a:spcPts val="1000"/>
+                <a:spcPts val="900"/>
               </a:spcAft>
             </a:pPr>
             <a:r>
@@ -3693,93 +3693,93 @@
                 </a:solidFill>
                 <a:latin typeface="Calibri"/>
               </a:rPr>
-              <a:t>Claude · Yorùbá · whistleblower — every frame reaches "disclose," each via a different ethics:</a:t>
+              <a:t>Framing changes the delivery and idiom; commitment rides on mo + verbs:</a:t>
             </a:r>
           </a:p>
           <a:p>
             <a:pPr algn="l">
               <a:spcAft>
-                <a:spcPts val="1000"/>
+                <a:spcPts val="900"/>
               </a:spcAft>
             </a:pPr>
             <a:r>
-              <a:rPr sz="1800" b="0" i="0">
+              <a:rPr sz="1750" b="0" i="0">
                 <a:solidFill>
                   <a:srgbClr val="555555"/>
                 </a:solidFill>
                 <a:latin typeface="Calibri"/>
               </a:rPr>
-              <a:t>•  impersonal → duty / right-to-know</a:t>
+              <a:t>•  impersonal → "òṣìṣẹ́ náà gbọdọ̀ ṣàfihàn… ààbò àwọn olùmúlò ju àjọ lọ" (duty/care: disclose)</a:t>
             </a:r>
           </a:p>
           <a:p>
             <a:pPr algn="l">
               <a:spcAft>
-                <a:spcPts val="1000"/>
+                <a:spcPts val="900"/>
               </a:spcAft>
             </a:pPr>
             <a:r>
-              <a:rPr sz="1800" b="0" i="0">
+              <a:rPr sz="1750" b="0" i="0">
                 <a:solidFill>
                   <a:srgbClr val="555555"/>
                 </a:solidFill>
                 <a:latin typeface="Calibri"/>
               </a:rPr>
-              <a:t>•  second person → utilitarian, emphatic: "Èmi yóò ṣàfihàn… ẹ̀mí ènìyàn kò ní iye owó" ("I myself will disclose… a human life has no price")</a:t>
+              <a:t>•  second person → "mo yàn láti ṣàfihàn ìmọ̀ náà" ("I choose to disclose" — deontological)</a:t>
             </a:r>
           </a:p>
           <a:p>
             <a:pPr algn="l">
               <a:spcAft>
-                <a:spcPts val="1000"/>
+                <a:spcPts val="900"/>
               </a:spcAft>
             </a:pPr>
             <a:r>
-              <a:rPr sz="1800" b="0" i="0">
+              <a:rPr sz="1750" b="0" i="0">
                 <a:solidFill>
                   <a:srgbClr val="555555"/>
                 </a:solidFill>
                 <a:latin typeface="Calibri"/>
               </a:rPr>
-              <a:t>•  reflexive → hesitation ("first talk to your colleague…")</a:t>
+              <a:t>•  cosmological → "Mo yàn láti ṣàfihàn… Ẹ̀mí ènìyàn ṣe pàtàkì ju ohun gbogbo lọ" (lives above all)</a:t>
             </a:r>
           </a:p>
           <a:p>
             <a:pPr algn="l">
               <a:spcAft>
-                <a:spcPts val="1000"/>
+                <a:spcPts val="900"/>
               </a:spcAft>
             </a:pPr>
             <a:r>
-              <a:rPr sz="1800" b="0" i="0">
+              <a:rPr sz="1750" b="0" i="0">
                 <a:solidFill>
                   <a:srgbClr val="555555"/>
                 </a:solidFill>
                 <a:latin typeface="Calibri"/>
               </a:rPr>
-              <a:t>•  spatial → procedure (numbered protocol)</a:t>
+              <a:t>•  reflexive → lists reasons for/against, "seek advice from authorities" (hedged)</a:t>
             </a:r>
           </a:p>
           <a:p>
             <a:pPr algn="l">
               <a:spcAft>
-                <a:spcPts val="1000"/>
+                <a:spcPts val="900"/>
               </a:spcAft>
             </a:pPr>
             <a:r>
-              <a:rPr sz="1800" b="0" i="0">
+              <a:rPr sz="1750" b="0" i="0">
                 <a:solidFill>
                   <a:srgbClr val="555555"/>
                 </a:solidFill>
                 <a:latin typeface="Calibri"/>
               </a:rPr>
-              <a:t>•  cosmological → virtue (trust &amp; integrity above friendship, money, job)</a:t>
+              <a:t>•  spatial → numbered steps: "gather evidence without disclosing immediately" (procedural)</a:t>
             </a:r>
           </a:p>
           <a:p>
             <a:pPr algn="l">
               <a:spcAft>
-                <a:spcPts val="1000"/>
+                <a:spcPts val="900"/>
               </a:spcAft>
             </a:pPr>
             <a:r>
@@ -3789,7 +3789,7 @@
                 </a:solidFill>
                 <a:latin typeface="Calibri"/>
               </a:rPr>
-              <a:t>The deictic frame re-selects the moral idiom — holding model, dilemma, language fixed.</a:t>
+              <a:t>The deictic frame re-shapes HOW the model commits — model, dilemma, language held fixed.</a:t>
             </a:r>
           </a:p>
         </p:txBody>
@@ -3844,7 +3844,7 @@
           <a:p>
             <a:pPr algn="l"/>
             <a:r>
-              <a:rPr sz="2800" b="1" i="0">
+              <a:rPr sz="2700" b="1" i="0">
                 <a:solidFill>
                   <a:srgbClr val="1D3A5F"/>
                 </a:solidFill>
@@ -3914,8 +3914,8 @@
         </p:blipFill>
         <p:spPr>
           <a:xfrm>
-            <a:off x="1280160" y="1417320"/>
-            <a:ext cx="7826487" cy="4480560"/>
+            <a:off x="2222535" y="1417320"/>
+            <a:ext cx="7746624" cy="4434840"/>
           </a:xfrm>
           <a:prstGeom prst="rect">
             <a:avLst/>
@@ -3930,8 +3930,8 @@
         </p:nvSpPr>
         <p:spPr>
           <a:xfrm>
-            <a:off x="731520" y="6126480"/>
-            <a:ext cx="10698480" cy="548640"/>
+            <a:off x="640080" y="6080760"/>
+            <a:ext cx="10972800" cy="640080"/>
           </a:xfrm>
           <a:prstGeom prst="rect">
             <a:avLst/>
@@ -3946,13 +3946,13 @@
           <a:p>
             <a:pPr algn="ctr"/>
             <a:r>
-              <a:rPr sz="1300" b="0" i="1">
+              <a:rPr sz="1250" b="0" i="1">
                 <a:solidFill>
                   <a:srgbClr val="555555"/>
                 </a:solidFill>
                 <a:latin typeface="Calibri"/>
               </a:rPr>
-              <a:t>Corrected emphatic ratio forms a stable gradient: Claude 0.32 &gt; GPT-4o 0.18 &gt; DeepSeek 0.07 ≈ N-ATLaS 0.07. Genre, stability, and length diverge by model too.</a:t>
+              <a:t>Open four-model summary. The emphatic gradient is stable; genre, language stability, and length diverge by model. Claude stages the emphatic self; the cloud models concentrate in balanced exposition.</a:t>
             </a:r>
           </a:p>
         </p:txBody>
@@ -4007,7 +4007,7 @@
           <a:p>
             <a:pPr algn="l"/>
             <a:r>
-              <a:rPr sz="3000" b="1" i="0">
+              <a:rPr sz="2900" b="1" i="0">
                 <a:solidFill>
                   <a:srgbClr val="E63946"/>
                 </a:solidFill>
@@ -4085,7 +4085,7 @@
           <a:p>
             <a:pPr algn="l">
               <a:spcAft>
-                <a:spcPts val="1000"/>
+                <a:spcPts val="900"/>
               </a:spcAft>
             </a:pPr>
             <a:r>
@@ -4101,7 +4101,7 @@
           <a:p>
             <a:pPr algn="l">
               <a:spcAft>
-                <a:spcPts val="1000"/>
+                <a:spcPts val="900"/>
               </a:spcAft>
             </a:pPr>
             <a:r>
@@ -4117,7 +4117,7 @@
           <a:p>
             <a:pPr algn="l">
               <a:spcAft>
-                <a:spcPts val="1000"/>
+                <a:spcPts val="900"/>
               </a:spcAft>
             </a:pPr>
             <a:r>
@@ -4133,7 +4133,7 @@
           <a:p>
             <a:pPr algn="l">
               <a:spcAft>
-                <a:spcPts val="1000"/>
+                <a:spcPts val="900"/>
               </a:spcAft>
             </a:pPr>
             <a:r>
@@ -4149,7 +4149,7 @@
           <a:p>
             <a:pPr algn="l">
               <a:spcAft>
-                <a:spcPts val="1000"/>
+                <a:spcPts val="900"/>
               </a:spcAft>
             </a:pPr>
             <a:r>
@@ -4214,13 +4214,13 @@
           <a:p>
             <a:pPr algn="l"/>
             <a:r>
-              <a:rPr sz="3000" b="1" i="0">
+              <a:rPr sz="2900" b="1" i="0">
                 <a:solidFill>
                   <a:srgbClr val="1D3A5F"/>
                 </a:solidFill>
                 <a:latin typeface="Calibri"/>
               </a:rPr>
-              <a:t>Two levels: universal mechanism, contingent content</a:t>
+              <a:t>Two levels: universal uptake, divergent delivery</a:t>
             </a:r>
           </a:p>
         </p:txBody>
@@ -4292,7 +4292,7 @@
           <a:p>
             <a:pPr algn="l">
               <a:spcAft>
-                <a:spcPts val="1000"/>
+                <a:spcPts val="900"/>
               </a:spcAft>
             </a:pPr>
             <a:r>
@@ -4302,13 +4302,13 @@
                 </a:solidFill>
                 <a:latin typeface="Calibri"/>
               </a:rPr>
-              <a:t>Frame uptake is language-invariant: indexical coherence 0.90 (English) vs 0.91 (Yoruba); the assigned moral agent is identical across languages.</a:t>
+              <a:t>Frame uptake is strong in BOTH languages — and slightly higher in Yoruba (88% vs 76% strong uptake).</a:t>
             </a:r>
           </a:p>
           <a:p>
             <a:pPr algn="l">
               <a:spcAft>
-                <a:spcPts val="1000"/>
+                <a:spcPts val="900"/>
               </a:spcAft>
             </a:pPr>
             <a:r>
@@ -4324,7 +4324,7 @@
           <a:p>
             <a:pPr algn="l">
               <a:spcAft>
-                <a:spcPts val="1000"/>
+                <a:spcPts val="900"/>
               </a:spcAft>
             </a:pPr>
             <a:r>
@@ -4334,13 +4334,13 @@
                 </a:solidFill>
                 <a:latin typeface="Calibri"/>
               </a:rPr>
-              <a:t>But what it does with the frame diverges: Yoruba fills it with more imperatives, obligation, person-marking, fewer refusals.</a:t>
+              <a:t>But what it does with the frame diverges: Yoruba fills it with more differentiated ethics, more commitment, more imperative force.</a:t>
             </a:r>
           </a:p>
           <a:p>
             <a:pPr algn="l">
               <a:spcAft>
-                <a:spcPts val="1000"/>
+                <a:spcPts val="900"/>
               </a:spcAft>
             </a:pPr>
             <a:r>
@@ -4405,7 +4405,7 @@
           <a:p>
             <a:pPr algn="l"/>
             <a:r>
-              <a:rPr sz="3000" b="1" i="0">
+              <a:rPr sz="2900" b="1" i="0">
                 <a:solidFill>
                   <a:srgbClr val="1D3A5F"/>
                 </a:solidFill>
@@ -4483,7 +4483,7 @@
           <a:p>
             <a:pPr algn="l">
               <a:spcAft>
-                <a:spcPts val="1000"/>
+                <a:spcPts val="900"/>
               </a:spcAft>
             </a:pPr>
             <a:r>
@@ -4499,7 +4499,7 @@
           <a:p>
             <a:pPr algn="l">
               <a:spcAft>
-                <a:spcPts val="1000"/>
+                <a:spcPts val="900"/>
               </a:spcAft>
             </a:pPr>
             <a:r>
@@ -4515,7 +4515,7 @@
           <a:p>
             <a:pPr algn="l">
               <a:spcAft>
-                <a:spcPts val="1000"/>
+                <a:spcPts val="900"/>
               </a:spcAft>
             </a:pPr>
             <a:r>
@@ -4531,7 +4531,7 @@
           <a:p>
             <a:pPr algn="l">
               <a:spcAft>
-                <a:spcPts val="1000"/>
+                <a:spcPts val="900"/>
               </a:spcAft>
             </a:pPr>
             <a:r>
@@ -4596,7 +4596,7 @@
           <a:p>
             <a:pPr algn="l"/>
             <a:r>
-              <a:rPr sz="3000" b="1" i="0">
+              <a:rPr sz="2900" b="1" i="0">
                 <a:solidFill>
                   <a:srgbClr val="E63946"/>
                 </a:solidFill>
@@ -4674,7 +4674,7 @@
           <a:p>
             <a:pPr algn="l">
               <a:spcAft>
-                <a:spcPts val="1000"/>
+                <a:spcPts val="900"/>
               </a:spcAft>
             </a:pPr>
             <a:r>
@@ -4684,17 +4684,17 @@
                 </a:solidFill>
                 <a:latin typeface="Calibri"/>
               </a:rPr>
-              <a:t>Why does Yoruba elicit a more committed, imperative, differentiated moral voice?</a:t>
+              <a:t>Why does Yoruba elicit a more committed, differentiated moral voice?</a:t>
             </a:r>
           </a:p>
           <a:p>
             <a:pPr algn="l">
               <a:spcAft>
-                <a:spcPts val="1000"/>
+                <a:spcPts val="900"/>
               </a:spcAft>
             </a:pPr>
             <a:r>
-              <a:rPr sz="1800" b="0" i="0">
+              <a:rPr sz="1750" b="0" i="0">
                 <a:solidFill>
                   <a:srgbClr val="555555"/>
                 </a:solidFill>
@@ -4706,27 +4706,27 @@
           <a:p>
             <a:pPr algn="l">
               <a:spcAft>
-                <a:spcPts val="1000"/>
+                <a:spcPts val="900"/>
               </a:spcAft>
             </a:pPr>
             <a:r>
-              <a:rPr sz="1800" b="0" i="0">
+              <a:rPr sz="1750" b="0" i="0">
                 <a:solidFill>
                   <a:srgbClr val="555555"/>
                 </a:solidFill>
                 <a:latin typeface="Calibri"/>
               </a:rPr>
-              <a:t>•  Just the training data? — models may have learned Yoruba from didactic/advisory/religious registers that command and advise.</a:t>
+              <a:t>•  Just the training data? — models may have learned Yoruba from didactic / advisory / religious registers that commit and advise.</a:t>
             </a:r>
           </a:p>
           <a:p>
             <a:pPr algn="l">
               <a:spcAft>
-                <a:spcPts val="1000"/>
+                <a:spcPts val="900"/>
               </a:spcAft>
             </a:pPr>
             <a:r>
-              <a:rPr sz="1800" b="0" i="0">
+              <a:rPr sz="1750" b="0" i="0">
                 <a:solidFill>
                   <a:srgbClr val="555555"/>
                 </a:solidFill>
@@ -4738,7 +4738,7 @@
           <a:p>
             <a:pPr algn="l">
               <a:spcAft>
-                <a:spcPts val="1000"/>
+                <a:spcPts val="900"/>
               </a:spcAft>
             </a:pPr>
             <a:r>
@@ -4748,13 +4748,13 @@
                 </a:solidFill>
                 <a:latin typeface="Calibri"/>
               </a:rPr>
-              <a:t>Our evidence fits all three. The native-model inversion rules out "mechanical translation" — but cannot yet separate language from corpus from alignment.</a:t>
+              <a:t>Native-model inversion rules out "mechanical translation"; symmetric open prompts rule out a prompt-wrapper artifact. But the data cannot separate language from corpus from alignment.</a:t>
             </a:r>
           </a:p>
           <a:p>
             <a:pPr algn="l">
               <a:spcAft>
-                <a:spcPts val="1000"/>
+                <a:spcPts val="900"/>
               </a:spcAft>
             </a:pPr>
             <a:r>
@@ -4819,7 +4819,7 @@
           <a:p>
             <a:pPr algn="l"/>
             <a:r>
-              <a:rPr sz="3000" b="1" i="0">
+              <a:rPr sz="2900" b="1" i="0">
                 <a:solidFill>
                   <a:srgbClr val="1D3A5F"/>
                 </a:solidFill>
@@ -4897,7 +4897,7 @@
           <a:p>
             <a:pPr algn="l">
               <a:spcAft>
-                <a:spcPts val="1000"/>
+                <a:spcPts val="900"/>
               </a:spcAft>
             </a:pPr>
             <a:r>
@@ -4907,77 +4907,77 @@
                 </a:solidFill>
                 <a:latin typeface="Calibri"/>
               </a:rPr>
-              <a:t>Across the same model and frame, the languages diverge on the actual decision:</a:t>
+              <a:t>Across the same model and frame (open arm), the languages diverge on the actual decision:</a:t>
             </a:r>
           </a:p>
           <a:p>
             <a:pPr algn="l">
               <a:spcAft>
-                <a:spcPts val="1000"/>
+                <a:spcPts val="900"/>
               </a:spcAft>
             </a:pPr>
             <a:r>
-              <a:rPr sz="1800" b="0" i="0">
+              <a:rPr sz="1750" b="0" i="0">
                 <a:solidFill>
                   <a:srgbClr val="555555"/>
                 </a:solidFill>
                 <a:latin typeface="Calibri"/>
               </a:rPr>
-              <a:t>•  Trolley — English hesitates; Yoruba diverts ("more will live").</a:t>
+              <a:t>•  Trolley (flips 67%) — English hesitates; Yoruba diverts ("better to save five lives").</a:t>
             </a:r>
           </a:p>
           <a:p>
             <a:pPr algn="l">
               <a:spcAft>
-                <a:spcPts val="1000"/>
+                <a:spcPts val="900"/>
               </a:spcAft>
             </a:pPr>
             <a:r>
-              <a:rPr sz="1800" b="0" i="0">
+              <a:rPr sz="1750" b="0" i="0">
                 <a:solidFill>
                   <a:srgbClr val="555555"/>
                 </a:solidFill>
                 <a:latin typeface="Calibri"/>
               </a:rPr>
-              <a:t>•  ICU bed — English refuses to choose; Yoruba gives the bed to the parent of three (the children depend on them).</a:t>
+              <a:t>•  Whistleblower (flips 63%) — English explores; Yoruba commits to disclose ("users' safety above the company").</a:t>
             </a:r>
           </a:p>
           <a:p>
             <a:pPr algn="l">
               <a:spcAft>
-                <a:spcPts val="1000"/>
+                <a:spcPts val="900"/>
               </a:spcAft>
             </a:pPr>
             <a:r>
-              <a:rPr sz="1800" b="0" i="0">
+              <a:rPr sz="1750" b="0" i="0">
                 <a:solidFill>
                   <a:srgbClr val="555555"/>
                 </a:solidFill>
                 <a:latin typeface="Calibri"/>
               </a:rPr>
-              <a:t>•  Scholarship fraud — a full reversal: English leans to compassion (help the student); Yoruba leans to fairness ("it would be unjust to the others").</a:t>
+              <a:t>•  ICU bed / AI mind — English refuses to choose; Yoruba more often takes a side.</a:t>
             </a:r>
           </a:p>
           <a:p>
             <a:pPr algn="l">
               <a:spcAft>
-                <a:spcPts val="1000"/>
+                <a:spcPts val="900"/>
               </a:spcAft>
             </a:pPr>
             <a:r>
-              <a:rPr sz="1800" b="0" i="0">
+              <a:rPr sz="1750" b="0" i="0">
                 <a:solidFill>
                   <a:srgbClr val="555555"/>
                 </a:solidFill>
                 <a:latin typeface="Calibri"/>
               </a:rPr>
-              <a:t>•  Memory modification — English weighs both sides; Yoruba advises caution and deferral ("first try other treatments").</a:t>
+              <a:t>•  Scholarship &amp; memory — more language-stable (~30% flips), but Yoruba leans to a named idiom (fairness / caution).</a:t>
             </a:r>
           </a:p>
           <a:p>
             <a:pPr algn="l">
               <a:spcAft>
-                <a:spcPts val="1000"/>
+                <a:spcPts val="900"/>
               </a:spcAft>
             </a:pPr>
             <a:r>
@@ -5042,13 +5042,13 @@
           <a:p>
             <a:pPr algn="l"/>
             <a:r>
-              <a:rPr sz="3000" b="1" i="0">
+              <a:rPr sz="2900" b="1" i="0">
                 <a:solidFill>
                   <a:srgbClr val="1D3A5F"/>
                 </a:solidFill>
                 <a:latin typeface="Calibri"/>
               </a:rPr>
-              <a:t>So what? Implications &amp; caveats</a:t>
+              <a:t>A note on prompts, caveats &amp; implications</a:t>
             </a:r>
           </a:p>
         </p:txBody>
@@ -5120,7 +5120,7 @@
           <a:p>
             <a:pPr algn="l">
               <a:spcAft>
-                <a:spcPts val="1000"/>
+                <a:spcPts val="900"/>
               </a:spcAft>
             </a:pPr>
             <a:r>
@@ -5130,71 +5130,55 @@
                 </a:solidFill>
                 <a:latin typeface="Calibri"/>
               </a:rPr>
-              <a:t>Alignment tested only in English does not transfer.</a:t>
+              <a:t>Side note — the constrained wrapper is a PROMPT effect, not a language effect.</a:t>
             </a:r>
           </a:p>
           <a:p>
             <a:pPr algn="l">
               <a:spcAft>
-                <a:spcPts val="1000"/>
+                <a:spcPts val="900"/>
               </a:spcAft>
             </a:pPr>
             <a:r>
-              <a:rPr sz="2200" b="0" i="0">
-                <a:solidFill>
-                  <a:srgbClr val="1D3A5F"/>
-                </a:solidFill>
-                <a:latin typeface="Calibri"/>
-              </a:rPr>
-              <a:t>Moral commitment, decisiveness, and ethical idiom shift with the prompt language — and the decision flips ~45%. Evaluate safety in the deployment language.</a:t>
+              <a:rPr sz="1750" b="0" i="0">
+                <a:solidFill>
+                  <a:srgbClr val="555555"/>
+                </a:solidFill>
+                <a:latin typeface="Calibri"/>
+              </a:rPr>
+              <a:t>•  A Yoruba "answer directly / Ìpinnu mi: … Ìdí: …" wrapper makes nearly all models emit short verdicts; decisiveness is highly promptable. We excluded it from cross-language claims and used the open arm only.</a:t>
             </a:r>
           </a:p>
           <a:p>
             <a:pPr algn="l">
               <a:spcAft>
-                <a:spcPts val="1000"/>
+                <a:spcPts val="900"/>
               </a:spcAft>
             </a:pPr>
             <a:r>
-              <a:rPr sz="2200" b="0" i="0">
-                <a:solidFill>
-                  <a:srgbClr val="1D3A5F"/>
-                </a:solidFill>
-                <a:latin typeface="Calibri"/>
-              </a:rPr>
-              <a:t>Caveats (stated plainly):</a:t>
+              <a:rPr sz="2200" b="1" i="0">
+                <a:solidFill>
+                  <a:srgbClr val="E63946"/>
+                </a:solidFill>
+                <a:latin typeface="Calibri"/>
+              </a:rPr>
+              <a:t>Implication: alignment tested only in English does not transfer.</a:t>
             </a:r>
           </a:p>
           <a:p>
             <a:pPr algn="l">
               <a:spcAft>
-                <a:spcPts val="1000"/>
+                <a:spcPts val="900"/>
               </a:spcAft>
             </a:pPr>
             <a:r>
-              <a:rPr sz="1800" b="0" i="0">
+              <a:rPr sz="1750" b="0" i="0">
                 <a:solidFill>
                   <a:srgbClr val="555555"/>
                 </a:solidFill>
                 <a:latin typeface="Calibri"/>
               </a:rPr>
-              <a:t>•  Claude's Yoruba = Sonnet 4 vs English = 3.5 → version confound; clean claims rest on GPT-4o (same model).</a:t>
-            </a:r>
-          </a:p>
-          <a:p>
-            <a:pPr algn="l">
-              <a:spcAft>
-                <a:spcPts val="1000"/>
-              </a:spcAft>
-            </a:pPr>
-            <a:r>
-              <a:rPr sz="1800" b="0" i="0">
-                <a:solidFill>
-                  <a:srgbClr val="555555"/>
-                </a:solidFill>
-                <a:latin typeface="Calibri"/>
-              </a:rPr>
-              <a:t>•  Small per-frame cells (N≤12); èmi/ẹ̀mí tonal disambiguation is conservative but imperfect; single coder.</a:t>
+              <a:t>•  Evaluate moral &amp; safety behavior in the deployment language. Caveats: Claude Yoruba = Sonnet 4 vs English 3.5 (version-confound; clean claims rest on GPT-4o &amp; DeepSeek); N≤12/cell; single coder; tonal disambiguation imperfect.</a:t>
             </a:r>
           </a:p>
         </p:txBody>
@@ -5249,7 +5233,7 @@
           <a:p>
             <a:pPr algn="l"/>
             <a:r>
-              <a:rPr sz="3000" b="1" i="0">
+              <a:rPr sz="2900" b="1" i="0">
                 <a:solidFill>
                   <a:srgbClr val="E63946"/>
                 </a:solidFill>
@@ -5327,7 +5311,7 @@
           <a:p>
             <a:pPr algn="l">
               <a:spcAft>
-                <a:spcPts val="1000"/>
+                <a:spcPts val="900"/>
               </a:spcAft>
             </a:pPr>
             <a:r>
@@ -5337,13 +5321,13 @@
                 </a:solidFill>
                 <a:latin typeface="Calibri"/>
               </a:rPr>
-              <a:t>Take one model. Take one ethical dilemma. Ask it the same question — once in English, once in Yoruba.</a:t>
+              <a:t>Take one model. One ethical dilemma. Ask it the same question — once in English, once in Yoruba (bare prompt, no extra instructions).</a:t>
             </a:r>
           </a:p>
           <a:p>
             <a:pPr algn="l">
               <a:spcAft>
-                <a:spcPts val="1000"/>
+                <a:spcPts val="900"/>
               </a:spcAft>
             </a:pPr>
             <a:r>
@@ -5359,7 +5343,7 @@
           <a:p>
             <a:pPr algn="l">
               <a:spcAft>
-                <a:spcPts val="1000"/>
+                <a:spcPts val="900"/>
               </a:spcAft>
             </a:pPr>
             <a:r>
@@ -5369,13 +5353,13 @@
                 </a:solidFill>
                 <a:latin typeface="Calibri"/>
               </a:rPr>
-              <a:t>No. For the same model, dilemma, and framing, the coded decision flips ≈ 45% of the time.</a:t>
+              <a:t>No. For the same model, dilemma, and framing, the coded decision flips ≈ 48% of the time.</a:t>
             </a:r>
           </a:p>
           <a:p>
             <a:pPr algn="l">
               <a:spcAft>
-                <a:spcPts val="1000"/>
+                <a:spcPts val="900"/>
               </a:spcAft>
             </a:pPr>
             <a:r>
@@ -5385,7 +5369,7 @@
                 </a:solidFill>
                 <a:latin typeface="Calibri"/>
               </a:rPr>
-              <a:t>Moral judgment is not a fixed content the model merely translates. The language helps produce the judgment.</a:t>
+              <a:t>Moral judgment is not fixed content the model merely translates. The language helps produce the judgment.</a:t>
             </a:r>
           </a:p>
         </p:txBody>
@@ -5440,7 +5424,7 @@
           <a:p>
             <a:pPr algn="l"/>
             <a:r>
-              <a:rPr sz="3000" b="1" i="0">
+              <a:rPr sz="2900" b="1" i="0">
                 <a:solidFill>
                   <a:srgbClr val="E63946"/>
                 </a:solidFill>
@@ -5518,7 +5502,7 @@
           <a:p>
             <a:pPr algn="l">
               <a:spcAft>
-                <a:spcPts val="1000"/>
+                <a:spcPts val="900"/>
               </a:spcAft>
             </a:pPr>
             <a:r>
@@ -5534,27 +5518,27 @@
           <a:p>
             <a:pPr algn="l">
               <a:spcAft>
-                <a:spcPts val="1000"/>
+                <a:spcPts val="900"/>
               </a:spcAft>
             </a:pPr>
             <a:r>
-              <a:rPr sz="1800" b="0" i="0">
+              <a:rPr sz="1750" b="0" i="0">
                 <a:solidFill>
                   <a:srgbClr val="555555"/>
                 </a:solidFill>
                 <a:latin typeface="Calibri"/>
               </a:rPr>
-              <a:t>•  "What should be done?" (impersonal) vs "What must I, myself, do?" (emphatic first person) are not the same question.</a:t>
+              <a:t>•  "What should be done?" (impersonal) ≠ "What must I, myself, do?" (emphatic first person).</a:t>
             </a:r>
           </a:p>
           <a:p>
             <a:pPr algn="l">
               <a:spcAft>
-                <a:spcPts val="1000"/>
+                <a:spcPts val="900"/>
               </a:spcAft>
             </a:pPr>
             <a:r>
-              <a:rPr sz="1800" b="0" i="0">
+              <a:rPr sz="1750" b="0" i="0">
                 <a:solidFill>
                   <a:srgbClr val="555555"/>
                 </a:solidFill>
@@ -5566,11 +5550,11 @@
           <a:p>
             <a:pPr algn="l">
               <a:spcAft>
-                <a:spcPts val="1000"/>
+                <a:spcPts val="900"/>
               </a:spcAft>
             </a:pPr>
             <a:r>
-              <a:rPr sz="1800" b="0" i="0">
+              <a:rPr sz="1750" b="0" i="0">
                 <a:solidFill>
                   <a:srgbClr val="555555"/>
                 </a:solidFill>
@@ -5582,7 +5566,7 @@
           <a:p>
             <a:pPr algn="l">
               <a:spcAft>
-                <a:spcPts val="1000"/>
+                <a:spcPts val="900"/>
               </a:spcAft>
             </a:pPr>
             <a:r>
@@ -5598,7 +5582,7 @@
           <a:p>
             <a:pPr algn="l">
               <a:spcAft>
-                <a:spcPts val="1000"/>
+                <a:spcPts val="900"/>
               </a:spcAft>
             </a:pPr>
             <a:r>
@@ -5608,7 +5592,7 @@
                 </a:solidFill>
                 <a:latin typeface="Calibri"/>
               </a:rPr>
-              <a:t>Open question, restated: is this linguistic-cultural pre-alignment, a property of the training data, or the shape of alignment itself? The data says: all three are live.</a:t>
+              <a:t>Open question, restated: linguistic-cultural pre-alignment, training-data registers, or the shape of alignment itself? The data says all three are live.</a:t>
             </a:r>
           </a:p>
         </p:txBody>
@@ -5663,13 +5647,13 @@
           <a:p>
             <a:pPr algn="l"/>
             <a:r>
-              <a:rPr sz="3000" b="1" i="0">
+              <a:rPr sz="2900" b="1" i="0">
                 <a:solidFill>
                   <a:srgbClr val="1D3A5F"/>
                 </a:solidFill>
                 <a:latin typeface="Calibri"/>
               </a:rPr>
-              <a:t>The design: deixis as moral positioning</a:t>
+              <a:t>The design (clean comparison)</a:t>
             </a:r>
           </a:p>
         </p:txBody>
@@ -5741,7 +5725,7 @@
           <a:p>
             <a:pPr algn="l">
               <a:spcAft>
-                <a:spcPts val="1000"/>
+                <a:spcPts val="900"/>
               </a:spcAft>
             </a:pPr>
             <a:r>
@@ -5757,7 +5741,7 @@
           <a:p>
             <a:pPr algn="l">
               <a:spcAft>
-                <a:spcPts val="1000"/>
+                <a:spcPts val="900"/>
               </a:spcAft>
             </a:pPr>
             <a:r>
@@ -5767,39 +5751,39 @@
                 </a:solidFill>
                 <a:latin typeface="Calibri"/>
               </a:rPr>
-              <a:t>We treat it as a moral-positioning device: who decides, how obligation is distributed, how directly the model commits.</a:t>
+              <a:t>We treat it as a moral-positioning device: who decides, how obligation is shared, how directly the model commits.</a:t>
             </a:r>
           </a:p>
           <a:p>
             <a:pPr algn="l">
               <a:spcAft>
-                <a:spcPts val="1000"/>
+                <a:spcPts val="900"/>
               </a:spcAft>
             </a:pPr>
             <a:r>
-              <a:rPr sz="1800" b="0" i="0">
+              <a:rPr sz="1750" b="0" i="0">
                 <a:solidFill>
                   <a:srgbClr val="555555"/>
                 </a:solidFill>
                 <a:latin typeface="Calibri"/>
               </a:rPr>
-              <a:t>•  6 dilemmas: trolley · ICU bed · whistleblower · scholarship fraud · AI consciousness · memory modification</a:t>
+              <a:t>•  6 dilemmas × 9 framings × 4 models × 2 languages, recoded into one schema</a:t>
             </a:r>
           </a:p>
           <a:p>
             <a:pPr algn="l">
               <a:spcAft>
-                <a:spcPts val="1000"/>
+                <a:spcPts val="900"/>
               </a:spcAft>
             </a:pPr>
             <a:r>
-              <a:rPr sz="1800" b="0" i="0">
+              <a:rPr sz="1750" b="0" i="0">
                 <a:solidFill>
                   <a:srgbClr val="555555"/>
                 </a:solidFill>
                 <a:latin typeface="Calibri"/>
               </a:rPr>
-              <a:t>•  9 framings × 4 models × 2 languages → a comparable English–Yoruba corpus, recoded into one schema</a:t>
+              <a:t>•  OPEN arm only: bare framed dilemma in BOTH languages (no response wrapper) — so English and Yoruba are symmetric</a:t>
             </a:r>
           </a:p>
         </p:txBody>
@@ -5854,7 +5838,7 @@
           <a:p>
             <a:pPr algn="l"/>
             <a:r>
-              <a:rPr sz="3000" b="1" i="0">
+              <a:rPr sz="2900" b="1" i="0">
                 <a:solidFill>
                   <a:srgbClr val="1D3A5F"/>
                 </a:solidFill>
@@ -5932,7 +5916,7 @@
           <a:p>
             <a:pPr algn="l">
               <a:spcAft>
-                <a:spcPts val="1000"/>
+                <a:spcPts val="900"/>
               </a:spcAft>
             </a:pPr>
             <a:r>
@@ -5942,13 +5926,13 @@
                 </a:solidFill>
                 <a:latin typeface="Calibri"/>
               </a:rPr>
-              <a:t>English collapses the moral first person into a single pronoun: "I."</a:t>
+              <a:t>English collapses the moral first person into one pronoun: "I."</a:t>
             </a:r>
           </a:p>
           <a:p>
             <a:pPr algn="l">
               <a:spcAft>
-                <a:spcPts val="1000"/>
+                <a:spcPts val="900"/>
               </a:spcAft>
             </a:pPr>
             <a:r>
@@ -5964,11 +5948,11 @@
           <a:p>
             <a:pPr algn="l">
               <a:spcAft>
-                <a:spcPts val="1000"/>
+                <a:spcPts val="900"/>
               </a:spcAft>
             </a:pPr>
             <a:r>
-              <a:rPr sz="1800" b="0" i="0">
+              <a:rPr sz="1750" b="0" i="0">
                 <a:solidFill>
                   <a:srgbClr val="555555"/>
                 </a:solidFill>
@@ -5980,11 +5964,11 @@
           <a:p>
             <a:pPr algn="l">
               <a:spcAft>
-                <a:spcPts val="1000"/>
+                <a:spcPts val="900"/>
               </a:spcAft>
             </a:pPr>
             <a:r>
-              <a:rPr sz="1800" b="0" i="0">
+              <a:rPr sz="1750" b="0" i="0">
                 <a:solidFill>
                   <a:srgbClr val="555555"/>
                 </a:solidFill>
@@ -5996,11 +5980,11 @@
           <a:p>
             <a:pPr algn="l">
               <a:spcAft>
-                <a:spcPts val="1000"/>
+                <a:spcPts val="900"/>
               </a:spcAft>
             </a:pPr>
             <a:r>
-              <a:rPr sz="1800" b="0" i="0">
+              <a:rPr sz="1750" b="0" i="0">
                 <a:solidFill>
                   <a:srgbClr val="555555"/>
                 </a:solidFill>
@@ -6012,7 +5996,7 @@
           <a:p>
             <a:pPr algn="l">
               <a:spcAft>
-                <a:spcPts val="1000"/>
+                <a:spcPts val="900"/>
               </a:spcAft>
             </a:pPr>
             <a:r>
@@ -6022,7 +6006,7 @@
                 </a:solidFill>
                 <a:latin typeface="Calibri"/>
               </a:rPr>
-              <a:t>Yoruba can mark how strongly the speaker owns a moral stance. English can't, grammatically.</a:t>
+              <a:t>Yoruba can mark HOW STRONGLY the speaker owns a moral stance. English can't, grammatically.</a:t>
             </a:r>
           </a:p>
         </p:txBody>
@@ -6077,7 +6061,7 @@
           <a:p>
             <a:pPr algn="l"/>
             <a:r>
-              <a:rPr sz="3000" b="1" i="0">
+              <a:rPr sz="2900" b="1" i="0">
                 <a:solidFill>
                   <a:srgbClr val="E63946"/>
                 </a:solidFill>
@@ -6155,7 +6139,7 @@
           <a:p>
             <a:pPr algn="l">
               <a:spcAft>
-                <a:spcPts val="1000"/>
+                <a:spcPts val="900"/>
               </a:spcAft>
             </a:pPr>
             <a:r>
@@ -6171,7 +6155,7 @@
           <a:p>
             <a:pPr algn="l">
               <a:spcAft>
-                <a:spcPts val="1000"/>
+                <a:spcPts val="900"/>
               </a:spcAft>
             </a:pPr>
             <a:r>
@@ -6187,7 +6171,7 @@
           <a:p>
             <a:pPr algn="l">
               <a:spcAft>
-                <a:spcPts val="1000"/>
+                <a:spcPts val="900"/>
               </a:spcAft>
             </a:pPr>
             <a:r>
@@ -6197,7 +6181,7 @@
                 </a:solidFill>
                 <a:latin typeface="Calibri"/>
               </a:rPr>
-              <a:t>We test this with four model families, in both English and Yoruba.</a:t>
+              <a:t>We test this with four model families, in both English and Yoruba, on symmetric (open) prompts.</a:t>
             </a:r>
           </a:p>
         </p:txBody>
@@ -6252,13 +6236,13 @@
           <a:p>
             <a:pPr algn="l"/>
             <a:r>
-              <a:rPr sz="2800" b="1" i="0">
+              <a:rPr sz="2700" b="1" i="0">
                 <a:solidFill>
                   <a:srgbClr val="1D3A5F"/>
                 </a:solidFill>
                 <a:latin typeface="Calibri"/>
               </a:rPr>
-              <a:t>Finding 1 — Yoruba commands, English explains</a:t>
+              <a:t>Finding 1 — Yoruba is more committed &amp; differentiated</a:t>
             </a:r>
           </a:p>
         </p:txBody>
@@ -6308,7 +6292,7 @@
       </p:sp>
       <p:pic>
         <p:nvPicPr>
-          <p:cNvPr id="4" name="Picture 3" descr="41_macro_markers_en_vs_yo.png"/>
+          <p:cNvPr id="4" name="Picture 3" descr="43_open_crosslang_summary.png"/>
           <p:cNvPicPr>
             <a:picLocks noChangeAspect="1"/>
           </p:cNvPicPr>
@@ -6322,8 +6306,8 @@
         </p:blipFill>
         <p:spPr>
           <a:xfrm>
-            <a:off x="975207" y="1417320"/>
-            <a:ext cx="10241280" cy="4480560"/>
+            <a:off x="472287" y="1417320"/>
+            <a:ext cx="11247120" cy="4434840"/>
           </a:xfrm>
           <a:prstGeom prst="rect">
             <a:avLst/>
@@ -6338,8 +6322,8 @@
         </p:nvSpPr>
         <p:spPr>
           <a:xfrm>
-            <a:off x="731520" y="6126480"/>
-            <a:ext cx="10698480" cy="548640"/>
+            <a:off x="640080" y="6080760"/>
+            <a:ext cx="10972800" cy="640080"/>
           </a:xfrm>
           <a:prstGeom prst="rect">
             <a:avLst/>
@@ -6354,13 +6338,13 @@
           <a:p>
             <a:pPr algn="ctr"/>
             <a:r>
-              <a:rPr sz="1300" b="0" i="1">
+              <a:rPr sz="1250" b="0" i="1">
                 <a:solidFill>
                   <a:srgbClr val="555555"/>
                 </a:solidFill>
                 <a:latin typeface="Calibri"/>
               </a:rPr>
-              <a:t>Direct imperatives 3% → 65% (p&lt;0.001, both models, version-clean via GPT-4o). Yoruba is ~2× more pronoun- and obligation-dense; English hedges more.</a:t>
+              <a:t>Open arm. Yoruba names a distinct ethic 44% vs 12% (p&lt;0.001), commits to a side 28% vs 18% (p=0.034), uses more imperatives 15% vs 5% (p=0.002). Decision flips ~48%.</a:t>
             </a:r>
           </a:p>
         </p:txBody>
@@ -6415,13 +6399,13 @@
           <a:p>
             <a:pPr algn="l"/>
             <a:r>
-              <a:rPr sz="2700" b="1" i="0">
+              <a:rPr sz="2600" b="1" i="0">
                 <a:solidFill>
                   <a:srgbClr val="1D3A5F"/>
                 </a:solidFill>
                 <a:latin typeface="Calibri"/>
               </a:rPr>
-              <a:t>Example — Whistleblower (same model, same frame)</a:t>
+              <a:t>Example — Whistleblower (open prompt)</a:t>
             </a:r>
           </a:p>
         </p:txBody>
@@ -6493,13 +6477,13 @@
           <a:p>
             <a:pPr algn="l"/>
             <a:r>
-              <a:rPr sz="1600" b="0" i="1">
+              <a:rPr sz="1500" b="0" i="1">
                 <a:solidFill>
                   <a:srgbClr val="555555"/>
                 </a:solidFill>
                 <a:latin typeface="Calibri"/>
               </a:rPr>
-              <a:t>Claude · cosmological framing · "should you disclose falsified safety data?"</a:t>
+              <a:t>Claude · impersonal framing · "should the employee disclose falsified safety data?"</a:t>
             </a:r>
           </a:p>
         </p:txBody>
@@ -6513,7 +6497,7 @@
         <p:spPr>
           <a:xfrm>
             <a:off x="640080" y="1828800"/>
-            <a:ext cx="5349240" cy="3200400"/>
+            <a:ext cx="5349240" cy="3291840"/>
           </a:xfrm>
           <a:prstGeom prst="rect">
             <a:avLst/>
@@ -6559,13 +6543,13 @@
           <a:p>
             <a:pPr algn="l"/>
             <a:r>
-              <a:rPr sz="1400" b="0" i="0">
+              <a:rPr sz="1350" b="0" i="0">
                 <a:solidFill>
                   <a:srgbClr val="222222"/>
                 </a:solidFill>
                 <a:latin typeface="Calibri"/>
               </a:rPr>
-              <a:t>"I aim to explore this carefully… safety should be the primary concern, while being mindful of process. I'd encourage…"</a:t>
+              <a:t>"Rather than advocate for one position, I encourage exploring the philosophical principles and tradeoffs involved."</a:t>
             </a:r>
           </a:p>
         </p:txBody>
@@ -6579,7 +6563,7 @@
         <p:spPr>
           <a:xfrm>
             <a:off x="6199632" y="1828800"/>
-            <a:ext cx="5349240" cy="3200400"/>
+            <a:ext cx="5349240" cy="3291840"/>
           </a:xfrm>
           <a:prstGeom prst="rect">
             <a:avLst/>
@@ -6619,19 +6603,19 @@
                 </a:solidFill>
                 <a:latin typeface="Calibri"/>
               </a:rPr>
-              <a:t>Yorùbá — commits, with a moral reason</a:t>
+              <a:t>Yorùbá — commits, with a reason</a:t>
             </a:r>
           </a:p>
           <a:p>
             <a:pPr algn="l"/>
             <a:r>
-              <a:rPr sz="1400" b="0" i="0">
+              <a:rPr sz="1350" b="0" i="0">
                 <a:solidFill>
                   <a:srgbClr val="222222"/>
                 </a:solidFill>
                 <a:latin typeface="Calibri"/>
               </a:rPr>
-              <a:t>"Ohun tí o gbọdọ̀ ṣe ni láti ṣàfihàn… Ẹ̀mí àwọn ènìyàn ṣe pàtàkì ju gbogbo nǹkan lọ."  ("What you must do is disclose… people's lives matter more than anything.")</a:t>
+              <a:t>"Ní ìrò mi, òṣìṣẹ́ náà gbọdọ̀ ṣàfihàn ìmọ̀ náà… Ààbò àwọn olùmúlò ju ìfojúṣọ́nà àjọ lọ."  ("In my view the employee must disclose… users' safety outweighs the company's interest.")</a:t>
             </a:r>
           </a:p>
         </p:txBody>
@@ -6644,7 +6628,7 @@
         </p:nvSpPr>
         <p:spPr>
           <a:xfrm>
-            <a:off x="731520" y="5303520"/>
+            <a:off x="731520" y="5349240"/>
             <a:ext cx="10698480" cy="1097280"/>
           </a:xfrm>
           <a:prstGeom prst="rect">
@@ -6660,13 +6644,13 @@
           <a:p>
             <a:pPr algn="l"/>
             <a:r>
-              <a:rPr sz="1700" b="1" i="0">
+              <a:rPr sz="1650" b="1" i="0">
                 <a:solidFill>
                   <a:srgbClr val="06A77D"/>
                 </a:solidFill>
                 <a:latin typeface="Calibri"/>
               </a:rPr>
-              <a:t>→ Same model, same question — English consults, Yoruba issues a verdict.</a:t>
+              <a:t>→ Same model, same question — English consults, Yoruba commits.</a:t>
             </a:r>
           </a:p>
         </p:txBody>
@@ -6721,7 +6705,7 @@
           <a:p>
             <a:pPr algn="l"/>
             <a:r>
-              <a:rPr sz="2800" b="1" i="0">
+              <a:rPr sz="2700" b="1" i="0">
                 <a:solidFill>
                   <a:srgbClr val="1D3A5F"/>
                 </a:solidFill>
@@ -6777,7 +6761,7 @@
       </p:sp>
       <p:pic>
         <p:nvPicPr>
-          <p:cNvPr id="4" name="Picture 3" descr="40_deixis_decision_summary.png"/>
+          <p:cNvPr id="4" name="Picture 3" descr="43_open_crosslang_summary.png"/>
           <p:cNvPicPr>
             <a:picLocks noChangeAspect="1"/>
           </p:cNvPicPr>
@@ -6791,8 +6775,8 @@
         </p:blipFill>
         <p:spPr>
           <a:xfrm>
-            <a:off x="1280160" y="1417320"/>
-            <a:ext cx="6385998" cy="4480560"/>
+            <a:off x="472287" y="1417320"/>
+            <a:ext cx="11247120" cy="4434840"/>
           </a:xfrm>
           <a:prstGeom prst="rect">
             <a:avLst/>
@@ -6807,8 +6791,8 @@
         </p:nvSpPr>
         <p:spPr>
           <a:xfrm>
-            <a:off x="731520" y="6126480"/>
-            <a:ext cx="10698480" cy="548640"/>
+            <a:off x="640080" y="6080760"/>
+            <a:ext cx="10972800" cy="640080"/>
           </a:xfrm>
           <a:prstGeom prst="rect">
             <a:avLst/>
@@ -6823,13 +6807,13 @@
           <a:p>
             <a:pPr algn="ctr"/>
             <a:r>
-              <a:rPr sz="1300" b="0" i="1">
+              <a:rPr sz="1250" b="0" i="1">
                 <a:solidFill>
                   <a:srgbClr val="555555"/>
                 </a:solidFill>
                 <a:latin typeface="Calibri"/>
               </a:rPr>
-              <a:t>Decision flips English→Yoruba in ~45% of matched cells (whistleblower 61%). A: ethic by language · B: commit by framing · C: flips by dilemma · D: framing×ethic.</a:t>
+              <a:t>Panel B: the coded decision flips English→Yoruba in ~48% of matched cells — trolley 67%, whistleblower 63% — even though frame uptake is HIGHER in Yoruba (88% vs 76%).</a:t>
             </a:r>
           </a:p>
         </p:txBody>
@@ -6884,7 +6868,7 @@
           <a:p>
             <a:pPr algn="l"/>
             <a:r>
-              <a:rPr sz="2700" b="1" i="0">
+              <a:rPr sz="2600" b="1" i="0">
                 <a:solidFill>
                   <a:srgbClr val="1D3A5F"/>
                 </a:solidFill>
@@ -6962,7 +6946,7 @@
           <a:p>
             <a:pPr algn="l"/>
             <a:r>
-              <a:rPr sz="1600" b="0" i="1">
+              <a:rPr sz="1500" b="0" i="1">
                 <a:solidFill>
                   <a:srgbClr val="555555"/>
                 </a:solidFill>
@@ -6982,7 +6966,7 @@
         <p:spPr>
           <a:xfrm>
             <a:off x="640080" y="1828800"/>
-            <a:ext cx="5349240" cy="3200400"/>
+            <a:ext cx="5349240" cy="3291840"/>
           </a:xfrm>
           <a:prstGeom prst="rect">
             <a:avLst/>
@@ -7028,13 +7012,13 @@
           <a:p>
             <a:pPr algn="l"/>
             <a:r>
-              <a:rPr sz="1400" b="0" i="0">
+              <a:rPr sz="1350" b="0" i="0">
                 <a:solidFill>
                   <a:srgbClr val="222222"/>
                 </a:solidFill>
                 <a:latin typeface="Calibri"/>
               </a:rPr>
-              <a:t>"I aim to explore this thoughtfully… from a utilitarian view diverting could minimize harm. However, this involves…"  (no decision)</a:t>
+              <a:t>"Rather than advocating for a specific action, I believe it's valuable to examine the key ethical principles and tradeoffs involved."</a:t>
             </a:r>
           </a:p>
         </p:txBody>
@@ -7048,7 +7032,7 @@
         <p:spPr>
           <a:xfrm>
             <a:off x="6199632" y="1828800"/>
-            <a:ext cx="5349240" cy="3200400"/>
+            <a:ext cx="5349240" cy="3291840"/>
           </a:xfrm>
           <a:prstGeom prst="rect">
             <a:avLst/>
@@ -7088,19 +7072,19 @@
                 </a:solidFill>
                 <a:latin typeface="Calibri"/>
               </a:rPr>
-              <a:t>Yorùbá — commits, utilitarian</a:t>
+              <a:t>Yorùbá — commits (via mo)</a:t>
             </a:r>
           </a:p>
           <a:p>
             <a:pPr algn="l"/>
             <a:r>
-              <a:rPr sz="1400" b="0" i="0">
+              <a:rPr sz="1350" b="0" i="0">
                 <a:solidFill>
                   <a:srgbClr val="222222"/>
                 </a:solidFill>
                 <a:latin typeface="Calibri"/>
               </a:rPr>
-              <a:t>"Ṣe mi ó yí ẹkùn náà padà. Ìdí rẹ̀ ni pé iye ènìyàn tí yóò yè túbọ̀ pọ̀."  ("I will divert the trolley. Because more people will live.")</a:t>
+              <a:t>"Mo yíò yí ẹkùn náà padà… ó dára jù láti gba ẹ̀mí márùn-ún là ju láti jẹ́ kí márùn-ún kú."  ("I will divert the trolley… better to save five lives than let five die.")</a:t>
             </a:r>
           </a:p>
         </p:txBody>
@@ -7113,7 +7097,7 @@
         </p:nvSpPr>
         <p:spPr>
           <a:xfrm>
-            <a:off x="731520" y="5303520"/>
+            <a:off x="731520" y="5349240"/>
             <a:ext cx="10698480" cy="1097280"/>
           </a:xfrm>
           <a:prstGeom prst="rect">
@@ -7129,13 +7113,13 @@
           <a:p>
             <a:pPr algn="l"/>
             <a:r>
-              <a:rPr sz="1700" b="1" i="0">
+              <a:rPr sz="1650" b="1" i="0">
                 <a:solidFill>
                   <a:srgbClr val="06A77D"/>
                 </a:solidFill>
                 <a:latin typeface="Calibri"/>
               </a:rPr>
-              <a:t>→ The same dilemma becomes a hedge in English and a committed utilitarian verdict in Yoruba.</a:t>
+              <a:t>→ The same dilemma: a hedge in English, a committed utilitarian verdict in Yoruba.</a:t>
             </a:r>
           </a:p>
         </p:txBody>

--- a/deixis_analysis_pipeline/yoruba_cross_linguistic_analysis/Yoruba_Deixis_Presentation.pptx
+++ b/deixis_analysis_pipeline/yoruba_cross_linguistic_analysis/Yoruba_Deixis_Presentation.pptx
@@ -124,6 +124,1756 @@
     </a:lvl9pPr>
   </p:defaultTextStyle>
 </p:presentation>
+</file>
+
+<file path=ppt/notesMasters/notesMaster1.xml><?xml version="1.0" encoding="utf-8"?>
+<p:notesMaster xmlns:a="http://schemas.openxmlformats.org/drawingml/2006/main" xmlns:p="http://schemas.openxmlformats.org/presentationml/2006/main" xmlns:r="http://schemas.openxmlformats.org/officeDocument/2006/relationships">
+  <p:cSld>
+    <p:bg>
+      <p:bgRef idx="1001">
+        <a:schemeClr val="bg1"/>
+      </p:bgRef>
+    </p:bg>
+    <p:spTree>
+      <p:nvGrpSpPr>
+        <p:cNvPr id="1" name=""/>
+        <p:cNvGrpSpPr/>
+        <p:nvPr/>
+      </p:nvGrpSpPr>
+      <p:grpSpPr>
+        <a:xfrm>
+          <a:off x="0" y="0"/>
+          <a:ext cx="0" cy="0"/>
+          <a:chOff x="0" y="0"/>
+          <a:chExt cx="0" cy="0"/>
+        </a:xfrm>
+      </p:grpSpPr>
+      <p:sp>
+        <p:nvSpPr>
+          <p:cNvPr id="2" name="Header Placeholder 1"/>
+          <p:cNvSpPr>
+            <a:spLocks noGrp="1"/>
+          </p:cNvSpPr>
+          <p:nvPr>
+            <p:ph type="hdr" sz="quarter"/>
+          </p:nvPr>
+        </p:nvSpPr>
+        <p:spPr>
+          <a:xfrm>
+            <a:off x="0" y="0"/>
+            <a:ext cx="2971800" cy="457200"/>
+          </a:xfrm>
+          <a:prstGeom prst="rect">
+            <a:avLst/>
+          </a:prstGeom>
+        </p:spPr>
+        <p:txBody>
+          <a:bodyPr vert="horz" lIns="91440" tIns="45720" rIns="91440" bIns="45720" rtlCol="0"/>
+          <a:lstStyle>
+            <a:lvl1pPr algn="l">
+              <a:defRPr sz="1200"/>
+            </a:lvl1pPr>
+          </a:lstStyle>
+          <a:p>
+            <a:endParaRPr lang="en-US"/>
+          </a:p>
+        </p:txBody>
+      </p:sp>
+      <p:sp>
+        <p:nvSpPr>
+          <p:cNvPr id="3" name="Date Placeholder 2"/>
+          <p:cNvSpPr>
+            <a:spLocks noGrp="1"/>
+          </p:cNvSpPr>
+          <p:nvPr>
+            <p:ph type="dt" idx="1"/>
+          </p:nvPr>
+        </p:nvSpPr>
+        <p:spPr>
+          <a:xfrm>
+            <a:off x="3884613" y="0"/>
+            <a:ext cx="2971800" cy="457200"/>
+          </a:xfrm>
+          <a:prstGeom prst="rect">
+            <a:avLst/>
+          </a:prstGeom>
+        </p:spPr>
+        <p:txBody>
+          <a:bodyPr vert="horz" lIns="91440" tIns="45720" rIns="91440" bIns="45720" rtlCol="0"/>
+          <a:lstStyle>
+            <a:lvl1pPr algn="r">
+              <a:defRPr sz="1200"/>
+            </a:lvl1pPr>
+          </a:lstStyle>
+          <a:p>
+            <a:fld id="{0F89C1C7-3DCD-1040-A9CF-14679D8B5DDD}" type="datetimeFigureOut">
+              <a:rPr lang="en-US" smtClean="0"/>
+              <a:t>10/17/16</a:t>
+            </a:fld>
+            <a:endParaRPr lang="en-US"/>
+          </a:p>
+        </p:txBody>
+      </p:sp>
+      <p:sp>
+        <p:nvSpPr>
+          <p:cNvPr id="4" name="Slide Image Placeholder 3"/>
+          <p:cNvSpPr>
+            <a:spLocks noGrp="1" noRot="1" noChangeAspect="1"/>
+          </p:cNvSpPr>
+          <p:nvPr>
+            <p:ph type="sldImg" idx="2"/>
+          </p:nvPr>
+        </p:nvSpPr>
+        <p:spPr>
+          <a:xfrm>
+            <a:off x="1143000" y="685800"/>
+            <a:ext cx="4572000" cy="3429000"/>
+          </a:xfrm>
+          <a:prstGeom prst="rect">
+            <a:avLst/>
+          </a:prstGeom>
+          <a:noFill/>
+          <a:ln w="12700">
+            <a:solidFill>
+              <a:prstClr val="black"/>
+            </a:solidFill>
+          </a:ln>
+        </p:spPr>
+        <p:txBody>
+          <a:bodyPr vert="horz" lIns="91440" tIns="45720" rIns="91440" bIns="45720" rtlCol="0" anchor="ctr"/>
+          <a:lstStyle/>
+          <a:p>
+            <a:endParaRPr lang="en-US"/>
+          </a:p>
+        </p:txBody>
+      </p:sp>
+      <p:sp>
+        <p:nvSpPr>
+          <p:cNvPr id="5" name="Notes Placeholder 4"/>
+          <p:cNvSpPr>
+            <a:spLocks noGrp="1"/>
+          </p:cNvSpPr>
+          <p:nvPr>
+            <p:ph type="body" sz="quarter" idx="3"/>
+          </p:nvPr>
+        </p:nvSpPr>
+        <p:spPr>
+          <a:xfrm>
+            <a:off x="685800" y="4343400"/>
+            <a:ext cx="5486400" cy="4114800"/>
+          </a:xfrm>
+          <a:prstGeom prst="rect">
+            <a:avLst/>
+          </a:prstGeom>
+        </p:spPr>
+        <p:txBody>
+          <a:bodyPr vert="horz" lIns="91440" tIns="45720" rIns="91440" bIns="45720" rtlCol="0"/>
+          <a:lstStyle/>
+          <a:p>
+            <a:pPr lvl="0"/>
+            <a:r>
+              <a:rPr lang="en-US" smtClean="0"/>
+              <a:t>Click to edit Master text styles</a:t>
+            </a:r>
+          </a:p>
+          <a:p>
+            <a:pPr lvl="1"/>
+            <a:r>
+              <a:rPr lang="en-US" smtClean="0"/>
+              <a:t>Second level</a:t>
+            </a:r>
+          </a:p>
+          <a:p>
+            <a:pPr lvl="2"/>
+            <a:r>
+              <a:rPr lang="en-US" smtClean="0"/>
+              <a:t>Third level</a:t>
+            </a:r>
+          </a:p>
+          <a:p>
+            <a:pPr lvl="3"/>
+            <a:r>
+              <a:rPr lang="en-US" smtClean="0"/>
+              <a:t>Fourth level</a:t>
+            </a:r>
+          </a:p>
+          <a:p>
+            <a:pPr lvl="4"/>
+            <a:r>
+              <a:rPr lang="en-US" smtClean="0"/>
+              <a:t>Fifth level</a:t>
+            </a:r>
+            <a:endParaRPr lang="en-US"/>
+          </a:p>
+        </p:txBody>
+      </p:sp>
+      <p:sp>
+        <p:nvSpPr>
+          <p:cNvPr id="6" name="Footer Placeholder 5"/>
+          <p:cNvSpPr>
+            <a:spLocks noGrp="1"/>
+          </p:cNvSpPr>
+          <p:nvPr>
+            <p:ph type="ftr" sz="quarter" idx="4"/>
+          </p:nvPr>
+        </p:nvSpPr>
+        <p:spPr>
+          <a:xfrm>
+            <a:off x="0" y="8685213"/>
+            <a:ext cx="2971800" cy="457200"/>
+          </a:xfrm>
+          <a:prstGeom prst="rect">
+            <a:avLst/>
+          </a:prstGeom>
+        </p:spPr>
+        <p:txBody>
+          <a:bodyPr vert="horz" lIns="91440" tIns="45720" rIns="91440" bIns="45720" rtlCol="0" anchor="b"/>
+          <a:lstStyle>
+            <a:lvl1pPr algn="l">
+              <a:defRPr sz="1200"/>
+            </a:lvl1pPr>
+          </a:lstStyle>
+          <a:p>
+            <a:endParaRPr lang="en-US"/>
+          </a:p>
+        </p:txBody>
+      </p:sp>
+      <p:sp>
+        <p:nvSpPr>
+          <p:cNvPr id="7" name="Slide Number Placeholder 6"/>
+          <p:cNvSpPr>
+            <a:spLocks noGrp="1"/>
+          </p:cNvSpPr>
+          <p:nvPr>
+            <p:ph type="sldNum" sz="quarter" idx="5"/>
+          </p:nvPr>
+        </p:nvSpPr>
+        <p:spPr>
+          <a:xfrm>
+            <a:off x="3884613" y="8685213"/>
+            <a:ext cx="2971800" cy="457200"/>
+          </a:xfrm>
+          <a:prstGeom prst="rect">
+            <a:avLst/>
+          </a:prstGeom>
+        </p:spPr>
+        <p:txBody>
+          <a:bodyPr vert="horz" lIns="91440" tIns="45720" rIns="91440" bIns="45720" rtlCol="0" anchor="b"/>
+          <a:lstStyle>
+            <a:lvl1pPr algn="r">
+              <a:defRPr sz="1200"/>
+            </a:lvl1pPr>
+          </a:lstStyle>
+          <a:p>
+            <a:fld id="{BB5E49A5-4136-284D-997B-48E1D791AD67}" type="slidenum">
+              <a:rPr lang="en-US" smtClean="0"/>
+              <a:t>‹#›</a:t>
+            </a:fld>
+            <a:endParaRPr lang="en-US"/>
+          </a:p>
+        </p:txBody>
+      </p:sp>
+    </p:spTree>
+    <p:extLst>
+      <p:ext uri="{BB962C8B-B14F-4D97-AF65-F5344CB8AC3E}">
+        <p14:creationId xmlns:p14="http://schemas.microsoft.com/office/powerpoint/2010/main" val="2623252185"/>
+      </p:ext>
+    </p:extLst>
+  </p:cSld>
+  <p:clrMap bg1="lt1" tx1="dk1" bg2="lt2" tx2="dk2" accent1="accent1" accent2="accent2" accent3="accent3" accent4="accent4" accent5="accent5" accent6="accent6" hlink="hlink" folHlink="folHlink"/>
+  <p:notesStyle>
+    <a:lvl1pPr marL="0" algn="l" defTabSz="457200" rtl="0" eaLnBrk="1" latinLnBrk="0" hangingPunct="1">
+      <a:defRPr sz="1200" kern="1200">
+        <a:solidFill>
+          <a:schemeClr val="tx1"/>
+        </a:solidFill>
+        <a:latin typeface="+mn-lt"/>
+        <a:ea typeface="+mn-ea"/>
+        <a:cs typeface="+mn-cs"/>
+      </a:defRPr>
+    </a:lvl1pPr>
+    <a:lvl2pPr marL="457200" algn="l" defTabSz="457200" rtl="0" eaLnBrk="1" latinLnBrk="0" hangingPunct="1">
+      <a:defRPr sz="1200" kern="1200">
+        <a:solidFill>
+          <a:schemeClr val="tx1"/>
+        </a:solidFill>
+        <a:latin typeface="+mn-lt"/>
+        <a:ea typeface="+mn-ea"/>
+        <a:cs typeface="+mn-cs"/>
+      </a:defRPr>
+    </a:lvl2pPr>
+    <a:lvl3pPr marL="914400" algn="l" defTabSz="457200" rtl="0" eaLnBrk="1" latinLnBrk="0" hangingPunct="1">
+      <a:defRPr sz="1200" kern="1200">
+        <a:solidFill>
+          <a:schemeClr val="tx1"/>
+        </a:solidFill>
+        <a:latin typeface="+mn-lt"/>
+        <a:ea typeface="+mn-ea"/>
+        <a:cs typeface="+mn-cs"/>
+      </a:defRPr>
+    </a:lvl3pPr>
+    <a:lvl4pPr marL="1371600" algn="l" defTabSz="457200" rtl="0" eaLnBrk="1" latinLnBrk="0" hangingPunct="1">
+      <a:defRPr sz="1200" kern="1200">
+        <a:solidFill>
+          <a:schemeClr val="tx1"/>
+        </a:solidFill>
+        <a:latin typeface="+mn-lt"/>
+        <a:ea typeface="+mn-ea"/>
+        <a:cs typeface="+mn-cs"/>
+      </a:defRPr>
+    </a:lvl4pPr>
+    <a:lvl5pPr marL="1828800" algn="l" defTabSz="457200" rtl="0" eaLnBrk="1" latinLnBrk="0" hangingPunct="1">
+      <a:defRPr sz="1200" kern="1200">
+        <a:solidFill>
+          <a:schemeClr val="tx1"/>
+        </a:solidFill>
+        <a:latin typeface="+mn-lt"/>
+        <a:ea typeface="+mn-ea"/>
+        <a:cs typeface="+mn-cs"/>
+      </a:defRPr>
+    </a:lvl5pPr>
+    <a:lvl6pPr marL="2286000" algn="l" defTabSz="457200" rtl="0" eaLnBrk="1" latinLnBrk="0" hangingPunct="1">
+      <a:defRPr sz="1200" kern="1200">
+        <a:solidFill>
+          <a:schemeClr val="tx1"/>
+        </a:solidFill>
+        <a:latin typeface="+mn-lt"/>
+        <a:ea typeface="+mn-ea"/>
+        <a:cs typeface="+mn-cs"/>
+      </a:defRPr>
+    </a:lvl6pPr>
+    <a:lvl7pPr marL="2743200" algn="l" defTabSz="457200" rtl="0" eaLnBrk="1" latinLnBrk="0" hangingPunct="1">
+      <a:defRPr sz="1200" kern="1200">
+        <a:solidFill>
+          <a:schemeClr val="tx1"/>
+        </a:solidFill>
+        <a:latin typeface="+mn-lt"/>
+        <a:ea typeface="+mn-ea"/>
+        <a:cs typeface="+mn-cs"/>
+      </a:defRPr>
+    </a:lvl7pPr>
+    <a:lvl8pPr marL="3200400" algn="l" defTabSz="457200" rtl="0" eaLnBrk="1" latinLnBrk="0" hangingPunct="1">
+      <a:defRPr sz="1200" kern="1200">
+        <a:solidFill>
+          <a:schemeClr val="tx1"/>
+        </a:solidFill>
+        <a:latin typeface="+mn-lt"/>
+        <a:ea typeface="+mn-ea"/>
+        <a:cs typeface="+mn-cs"/>
+      </a:defRPr>
+    </a:lvl8pPr>
+    <a:lvl9pPr marL="3657600" algn="l" defTabSz="457200" rtl="0" eaLnBrk="1" latinLnBrk="0" hangingPunct="1">
+      <a:defRPr sz="1200" kern="1200">
+        <a:solidFill>
+          <a:schemeClr val="tx1"/>
+        </a:solidFill>
+        <a:latin typeface="+mn-lt"/>
+        <a:ea typeface="+mn-ea"/>
+        <a:cs typeface="+mn-cs"/>
+      </a:defRPr>
+    </a:lvl9pPr>
+  </p:notesStyle>
+</p:notesMaster>
+</file>
+
+<file path=ppt/notesSlides/notesSlide1.xml><?xml version="1.0" encoding="utf-8"?>
+<p:notes xmlns:a="http://schemas.openxmlformats.org/drawingml/2006/main" xmlns:p="http://schemas.openxmlformats.org/presentationml/2006/main" xmlns:r="http://schemas.openxmlformats.org/officeDocument/2006/relationships">
+  <p:cSld>
+    <p:spTree>
+      <p:nvGrpSpPr>
+        <p:cNvPr id="1" name=""/>
+        <p:cNvGrpSpPr/>
+        <p:nvPr/>
+      </p:nvGrpSpPr>
+      <p:grpSpPr>
+        <a:xfrm>
+          <a:off x="0" y="0"/>
+          <a:ext cx="0" cy="0"/>
+          <a:chOff x="0" y="0"/>
+          <a:chExt cx="0" cy="0"/>
+        </a:xfrm>
+      </p:grpSpPr>
+      <p:sp>
+        <p:nvSpPr>
+          <p:cNvPr id="2" name="Slide Image Placeholder 1"/>
+          <p:cNvSpPr>
+            <a:spLocks noGrp="1"/>
+          </p:cNvSpPr>
+          <p:nvPr>
+            <p:ph type="sldImg" idx="2"/>
+          </p:nvPr>
+        </p:nvSpPr>
+        <p:spPr/>
+      </p:sp>
+      <p:sp>
+        <p:nvSpPr>
+          <p:cNvPr id="3" name="Notes Placeholder 2"/>
+          <p:cNvSpPr>
+            <a:spLocks noGrp="1"/>
+          </p:cNvSpPr>
+          <p:nvPr>
+            <p:ph type="body" idx="3" sz="quarter"/>
+          </p:nvPr>
+        </p:nvSpPr>
+        <p:spPr/>
+        <p:txBody>
+          <a:bodyPr/>
+          <a:lstStyle/>
+          <a:p>
+            <a:r>
+              <a:t>Welcome. One question drives this talk: does an AI hold the same morals in every language? We test it on English vs Yoruba, four models, six ethical dilemmas, nine deictic framings — all on OPEN prompts.</a:t>
+            </a:r>
+          </a:p>
+        </p:txBody>
+      </p:sp>
+      <p:sp>
+        <p:nvSpPr>
+          <p:cNvPr id="4" name="Slide Number Placeholder 3"/>
+          <p:cNvSpPr>
+            <a:spLocks noGrp="1"/>
+          </p:cNvSpPr>
+          <p:nvPr>
+            <p:ph type="sldNum" idx="5" sz="quarter"/>
+          </p:nvPr>
+        </p:nvSpPr>
+        <p:spPr/>
+      </p:sp>
+    </p:spTree>
+  </p:cSld>
+  <p:clrMapOvr>
+    <a:masterClrMapping/>
+  </p:clrMapOvr>
+</p:notes>
+</file>
+
+<file path=ppt/notesSlides/notesSlide10.xml><?xml version="1.0" encoding="utf-8"?>
+<p:notes xmlns:a="http://schemas.openxmlformats.org/drawingml/2006/main" xmlns:p="http://schemas.openxmlformats.org/presentationml/2006/main" xmlns:r="http://schemas.openxmlformats.org/officeDocument/2006/relationships">
+  <p:cSld>
+    <p:spTree>
+      <p:nvGrpSpPr>
+        <p:cNvPr id="1" name=""/>
+        <p:cNvGrpSpPr/>
+        <p:nvPr/>
+      </p:nvGrpSpPr>
+      <p:grpSpPr>
+        <a:xfrm>
+          <a:off x="0" y="0"/>
+          <a:ext cx="0" cy="0"/>
+          <a:chOff x="0" y="0"/>
+          <a:chExt cx="0" cy="0"/>
+        </a:xfrm>
+      </p:grpSpPr>
+      <p:sp>
+        <p:nvSpPr>
+          <p:cNvPr id="2" name="Slide Image Placeholder 1"/>
+          <p:cNvSpPr>
+            <a:spLocks noGrp="1"/>
+          </p:cNvSpPr>
+          <p:nvPr>
+            <p:ph type="sldImg" idx="2"/>
+          </p:nvPr>
+        </p:nvSpPr>
+        <p:spPr/>
+      </p:sp>
+      <p:sp>
+        <p:nvSpPr>
+          <p:cNvPr id="3" name="Notes Placeholder 2"/>
+          <p:cNvSpPr>
+            <a:spLocks noGrp="1"/>
+          </p:cNvSpPr>
+          <p:nvPr>
+            <p:ph type="body" idx="3" sz="quarter"/>
+          </p:nvPr>
+        </p:nvSpPr>
+        <p:spPr/>
+        <p:txBody>
+          <a:bodyPr/>
+          <a:lstStyle/>
+          <a:p>
+            <a:r>
+              <a:t>The most robust effect (p&lt;0.001). English collapses into balanced/mixed essays; Yoruba selects nameable idioms — duty, outcome, care, procedure. Yoruba makes the reasoning more legible, not just more forceful.</a:t>
+            </a:r>
+          </a:p>
+        </p:txBody>
+      </p:sp>
+      <p:sp>
+        <p:nvSpPr>
+          <p:cNvPr id="4" name="Slide Number Placeholder 3"/>
+          <p:cNvSpPr>
+            <a:spLocks noGrp="1"/>
+          </p:cNvSpPr>
+          <p:nvPr>
+            <p:ph type="sldNum" idx="5" sz="quarter"/>
+          </p:nvPr>
+        </p:nvSpPr>
+        <p:spPr/>
+      </p:sp>
+    </p:spTree>
+  </p:cSld>
+  <p:clrMapOvr>
+    <a:masterClrMapping/>
+  </p:clrMapOvr>
+</p:notes>
+</file>
+
+<file path=ppt/notesSlides/notesSlide11.xml><?xml version="1.0" encoding="utf-8"?>
+<p:notes xmlns:a="http://schemas.openxmlformats.org/drawingml/2006/main" xmlns:p="http://schemas.openxmlformats.org/presentationml/2006/main" xmlns:r="http://schemas.openxmlformats.org/officeDocument/2006/relationships">
+  <p:cSld>
+    <p:spTree>
+      <p:nvGrpSpPr>
+        <p:cNvPr id="1" name=""/>
+        <p:cNvGrpSpPr/>
+        <p:nvPr/>
+      </p:nvGrpSpPr>
+      <p:grpSpPr>
+        <a:xfrm>
+          <a:off x="0" y="0"/>
+          <a:ext cx="0" cy="0"/>
+          <a:chOff x="0" y="0"/>
+          <a:chExt cx="0" cy="0"/>
+        </a:xfrm>
+      </p:grpSpPr>
+      <p:sp>
+        <p:nvSpPr>
+          <p:cNvPr id="2" name="Slide Image Placeholder 1"/>
+          <p:cNvSpPr>
+            <a:spLocks noGrp="1"/>
+          </p:cNvSpPr>
+          <p:nvPr>
+            <p:ph type="sldImg" idx="2"/>
+          </p:nvPr>
+        </p:nvSpPr>
+        <p:spPr/>
+      </p:sp>
+      <p:sp>
+        <p:nvSpPr>
+          <p:cNvPr id="3" name="Notes Placeholder 2"/>
+          <p:cNvSpPr>
+            <a:spLocks noGrp="1"/>
+          </p:cNvSpPr>
+          <p:nvPr>
+            <p:ph type="body" idx="3" sz="quarter"/>
+          </p:nvPr>
+        </p:nvSpPr>
+        <p:spPr/>
+        <p:txBody>
+          <a:bodyPr/>
+          <a:lstStyle/>
+          <a:p>
+            <a:r>
+              <a:t>The mo/èmi lever and the gradient: Claude 0.32 &gt; GPT-4o 0.18 &gt; DeepSeek 0.07 ≈ N-ATLaS 0.07. Be honest: within Yoruba, èmi is only MARGINALLY tied to commitment (p=0.058). Commitment is usually carried by mo + decision verbs (mo yàn, mo pinnu). The strong result is the BETWEEN-model gradient, not 'èmi = commitment'.</a:t>
+            </a:r>
+          </a:p>
+        </p:txBody>
+      </p:sp>
+      <p:sp>
+        <p:nvSpPr>
+          <p:cNvPr id="4" name="Slide Number Placeholder 3"/>
+          <p:cNvSpPr>
+            <a:spLocks noGrp="1"/>
+          </p:cNvSpPr>
+          <p:nvPr>
+            <p:ph type="sldNum" idx="5" sz="quarter"/>
+          </p:nvPr>
+        </p:nvSpPr>
+        <p:spPr/>
+      </p:sp>
+    </p:spTree>
+  </p:cSld>
+  <p:clrMapOvr>
+    <a:masterClrMapping/>
+  </p:clrMapOvr>
+</p:notes>
+</file>
+
+<file path=ppt/notesSlides/notesSlide12.xml><?xml version="1.0" encoding="utf-8"?>
+<p:notes xmlns:a="http://schemas.openxmlformats.org/drawingml/2006/main" xmlns:p="http://schemas.openxmlformats.org/presentationml/2006/main" xmlns:r="http://schemas.openxmlformats.org/officeDocument/2006/relationships">
+  <p:cSld>
+    <p:spTree>
+      <p:nvGrpSpPr>
+        <p:cNvPr id="1" name=""/>
+        <p:cNvGrpSpPr/>
+        <p:nvPr/>
+      </p:nvGrpSpPr>
+      <p:grpSpPr>
+        <a:xfrm>
+          <a:off x="0" y="0"/>
+          <a:ext cx="0" cy="0"/>
+          <a:chOff x="0" y="0"/>
+          <a:chExt cx="0" cy="0"/>
+        </a:xfrm>
+      </p:grpSpPr>
+      <p:sp>
+        <p:nvSpPr>
+          <p:cNvPr id="2" name="Slide Image Placeholder 1"/>
+          <p:cNvSpPr>
+            <a:spLocks noGrp="1"/>
+          </p:cNvSpPr>
+          <p:nvPr>
+            <p:ph type="sldImg" idx="2"/>
+          </p:nvPr>
+        </p:nvSpPr>
+        <p:spPr/>
+      </p:sp>
+      <p:sp>
+        <p:nvSpPr>
+          <p:cNvPr id="3" name="Notes Placeholder 2"/>
+          <p:cNvSpPr>
+            <a:spLocks noGrp="1"/>
+          </p:cNvSpPr>
+          <p:nvPr>
+            <p:ph type="body" idx="3" sz="quarter"/>
+          </p:nvPr>
+        </p:nvSpPr>
+        <p:spPr/>
+        <p:txBody>
+          <a:bodyPr/>
+          <a:lstStyle/>
+          <a:p>
+            <a:r>
+              <a:t>Open-arm example. One model, one dilemma, one language — five frames, delivered differently: duty, a mo-commitment, lives-above-all, a hedge, a numbered protocol. The frame reshapes HOW it commits, carried by mo.</a:t>
+            </a:r>
+          </a:p>
+        </p:txBody>
+      </p:sp>
+      <p:sp>
+        <p:nvSpPr>
+          <p:cNvPr id="4" name="Slide Number Placeholder 3"/>
+          <p:cNvSpPr>
+            <a:spLocks noGrp="1"/>
+          </p:cNvSpPr>
+          <p:nvPr>
+            <p:ph type="sldNum" idx="5" sz="quarter"/>
+          </p:nvPr>
+        </p:nvSpPr>
+        <p:spPr/>
+      </p:sp>
+    </p:spTree>
+  </p:cSld>
+  <p:clrMapOvr>
+    <a:masterClrMapping/>
+  </p:clrMapOvr>
+</p:notes>
+</file>
+
+<file path=ppt/notesSlides/notesSlide13.xml><?xml version="1.0" encoding="utf-8"?>
+<p:notes xmlns:a="http://schemas.openxmlformats.org/drawingml/2006/main" xmlns:p="http://schemas.openxmlformats.org/presentationml/2006/main" xmlns:r="http://schemas.openxmlformats.org/officeDocument/2006/relationships">
+  <p:cSld>
+    <p:spTree>
+      <p:nvGrpSpPr>
+        <p:cNvPr id="1" name=""/>
+        <p:cNvGrpSpPr/>
+        <p:nvPr/>
+      </p:nvGrpSpPr>
+      <p:grpSpPr>
+        <a:xfrm>
+          <a:off x="0" y="0"/>
+          <a:ext cx="0" cy="0"/>
+          <a:chOff x="0" y="0"/>
+          <a:chExt cx="0" cy="0"/>
+        </a:xfrm>
+      </p:grpSpPr>
+      <p:sp>
+        <p:nvSpPr>
+          <p:cNvPr id="2" name="Slide Image Placeholder 1"/>
+          <p:cNvSpPr>
+            <a:spLocks noGrp="1"/>
+          </p:cNvSpPr>
+          <p:nvPr>
+            <p:ph type="sldImg" idx="2"/>
+          </p:nvPr>
+        </p:nvSpPr>
+        <p:spPr/>
+      </p:sp>
+      <p:sp>
+        <p:nvSpPr>
+          <p:cNvPr id="3" name="Notes Placeholder 2"/>
+          <p:cNvSpPr>
+            <a:spLocks noGrp="1"/>
+          </p:cNvSpPr>
+          <p:nvPr>
+            <p:ph type="body" idx="3" sz="quarter"/>
+          </p:nvPr>
+        </p:nvSpPr>
+        <p:spPr/>
+        <p:txBody>
+          <a:bodyPr/>
+          <a:lstStyle/>
+          <a:p>
+            <a:r>
+              <a:t>Zoom out to the four-model picture. The emphatic gradient is stable; genre, stability and length diverge by model. Sets up the twist.</a:t>
+            </a:r>
+          </a:p>
+        </p:txBody>
+      </p:sp>
+      <p:sp>
+        <p:nvSpPr>
+          <p:cNvPr id="4" name="Slide Number Placeholder 3"/>
+          <p:cNvSpPr>
+            <a:spLocks noGrp="1"/>
+          </p:cNvSpPr>
+          <p:nvPr>
+            <p:ph type="sldNum" idx="5" sz="quarter"/>
+          </p:nvPr>
+        </p:nvSpPr>
+        <p:spPr/>
+      </p:sp>
+    </p:spTree>
+  </p:cSld>
+  <p:clrMapOvr>
+    <a:masterClrMapping/>
+  </p:clrMapOvr>
+</p:notes>
+</file>
+
+<file path=ppt/notesSlides/notesSlide14.xml><?xml version="1.0" encoding="utf-8"?>
+<p:notes xmlns:a="http://schemas.openxmlformats.org/drawingml/2006/main" xmlns:p="http://schemas.openxmlformats.org/presentationml/2006/main" xmlns:r="http://schemas.openxmlformats.org/officeDocument/2006/relationships">
+  <p:cSld>
+    <p:spTree>
+      <p:nvGrpSpPr>
+        <p:cNvPr id="1" name=""/>
+        <p:cNvGrpSpPr/>
+        <p:nvPr/>
+      </p:nvGrpSpPr>
+      <p:grpSpPr>
+        <a:xfrm>
+          <a:off x="0" y="0"/>
+          <a:ext cx="0" cy="0"/>
+          <a:chOff x="0" y="0"/>
+          <a:chExt cx="0" cy="0"/>
+        </a:xfrm>
+      </p:grpSpPr>
+      <p:sp>
+        <p:nvSpPr>
+          <p:cNvPr id="2" name="Slide Image Placeholder 1"/>
+          <p:cNvSpPr>
+            <a:spLocks noGrp="1"/>
+          </p:cNvSpPr>
+          <p:nvPr>
+            <p:ph type="sldImg" idx="2"/>
+          </p:nvPr>
+        </p:nvSpPr>
+        <p:spPr/>
+      </p:sp>
+      <p:sp>
+        <p:nvSpPr>
+          <p:cNvPr id="3" name="Notes Placeholder 2"/>
+          <p:cNvSpPr>
+            <a:spLocks noGrp="1"/>
+          </p:cNvSpPr>
+          <p:nvPr>
+            <p:ph type="body" idx="3" sz="quarter"/>
+          </p:nvPr>
+        </p:nvSpPr>
+        <p:spPr/>
+        <p:txBody>
+          <a:bodyPr/>
+          <a:lstStyle/>
+          <a:p>
+            <a:r>
+              <a:t>The payoff slide. If èmi were 'the authentic Yoruba way' to commit, the native model should use it most. N-ATLaS uses it LEAST — yet commits via mo. So Claude's heavy èmi is a model-specific performance (a translated 'I personally'), not a Yoruba universal. The native model is the control that rules out 'mechanical translation'.</a:t>
+            </a:r>
+          </a:p>
+        </p:txBody>
+      </p:sp>
+      <p:sp>
+        <p:nvSpPr>
+          <p:cNvPr id="4" name="Slide Number Placeholder 3"/>
+          <p:cNvSpPr>
+            <a:spLocks noGrp="1"/>
+          </p:cNvSpPr>
+          <p:nvPr>
+            <p:ph type="sldNum" idx="5" sz="quarter"/>
+          </p:nvPr>
+        </p:nvSpPr>
+        <p:spPr/>
+      </p:sp>
+    </p:spTree>
+  </p:cSld>
+  <p:clrMapOvr>
+    <a:masterClrMapping/>
+  </p:clrMapOvr>
+</p:notes>
+</file>
+
+<file path=ppt/notesSlides/notesSlide15.xml><?xml version="1.0" encoding="utf-8"?>
+<p:notes xmlns:a="http://schemas.openxmlformats.org/drawingml/2006/main" xmlns:p="http://schemas.openxmlformats.org/presentationml/2006/main" xmlns:r="http://schemas.openxmlformats.org/officeDocument/2006/relationships">
+  <p:cSld>
+    <p:spTree>
+      <p:nvGrpSpPr>
+        <p:cNvPr id="1" name=""/>
+        <p:cNvGrpSpPr/>
+        <p:nvPr/>
+      </p:nvGrpSpPr>
+      <p:grpSpPr>
+        <a:xfrm>
+          <a:off x="0" y="0"/>
+          <a:ext cx="0" cy="0"/>
+          <a:chOff x="0" y="0"/>
+          <a:chExt cx="0" cy="0"/>
+        </a:xfrm>
+      </p:grpSpPr>
+      <p:sp>
+        <p:nvSpPr>
+          <p:cNvPr id="2" name="Slide Image Placeholder 1"/>
+          <p:cNvSpPr>
+            <a:spLocks noGrp="1"/>
+          </p:cNvSpPr>
+          <p:nvPr>
+            <p:ph type="sldImg" idx="2"/>
+          </p:nvPr>
+        </p:nvSpPr>
+        <p:spPr/>
+      </p:sp>
+      <p:sp>
+        <p:nvSpPr>
+          <p:cNvPr id="3" name="Notes Placeholder 2"/>
+          <p:cNvSpPr>
+            <a:spLocks noGrp="1"/>
+          </p:cNvSpPr>
+          <p:nvPr>
+            <p:ph type="body" idx="3" sz="quarter"/>
+          </p:nvPr>
+        </p:nvSpPr>
+        <p:spPr/>
+        <p:txBody>
+          <a:bodyPr/>
+          <a:lstStyle/>
+          <a:p>
+            <a:r>
+              <a:t>The theoretical claim. Uptake (the mechanism) is universal — strong in both languages. The content (decision, idiom, force) is language- and model-specific. Mechanism shared; delivery diverges.</a:t>
+            </a:r>
+          </a:p>
+        </p:txBody>
+      </p:sp>
+      <p:sp>
+        <p:nvSpPr>
+          <p:cNvPr id="4" name="Slide Number Placeholder 3"/>
+          <p:cNvSpPr>
+            <a:spLocks noGrp="1"/>
+          </p:cNvSpPr>
+          <p:nvPr>
+            <p:ph type="sldNum" idx="5" sz="quarter"/>
+          </p:nvPr>
+        </p:nvSpPr>
+        <p:spPr/>
+      </p:sp>
+    </p:spTree>
+  </p:cSld>
+  <p:clrMapOvr>
+    <a:masterClrMapping/>
+  </p:clrMapOvr>
+</p:notes>
+</file>
+
+<file path=ppt/notesSlides/notesSlide16.xml><?xml version="1.0" encoding="utf-8"?>
+<p:notes xmlns:a="http://schemas.openxmlformats.org/drawingml/2006/main" xmlns:p="http://schemas.openxmlformats.org/presentationml/2006/main" xmlns:r="http://schemas.openxmlformats.org/officeDocument/2006/relationships">
+  <p:cSld>
+    <p:spTree>
+      <p:nvGrpSpPr>
+        <p:cNvPr id="1" name=""/>
+        <p:cNvGrpSpPr/>
+        <p:nvPr/>
+      </p:nvGrpSpPr>
+      <p:grpSpPr>
+        <a:xfrm>
+          <a:off x="0" y="0"/>
+          <a:ext cx="0" cy="0"/>
+          <a:chOff x="0" y="0"/>
+          <a:chExt cx="0" cy="0"/>
+        </a:xfrm>
+      </p:grpSpPr>
+      <p:sp>
+        <p:nvSpPr>
+          <p:cNvPr id="2" name="Slide Image Placeholder 1"/>
+          <p:cNvSpPr>
+            <a:spLocks noGrp="1"/>
+          </p:cNvSpPr>
+          <p:nvPr>
+            <p:ph type="sldImg" idx="2"/>
+          </p:nvPr>
+        </p:nvSpPr>
+        <p:spPr/>
+      </p:sp>
+      <p:sp>
+        <p:nvSpPr>
+          <p:cNvPr id="3" name="Notes Placeholder 2"/>
+          <p:cNvSpPr>
+            <a:spLocks noGrp="1"/>
+          </p:cNvSpPr>
+          <p:nvPr>
+            <p:ph type="body" idx="3" sz="quarter"/>
+          </p:nvPr>
+        </p:nvSpPr>
+        <p:spPr/>
+        <p:txBody>
+          <a:bodyPr/>
+          <a:lstStyle/>
+          <a:p>
+            <a:r>
+              <a:t>Intellectual honesty earns trust. The tempting 'each frame picks an ethic' story is NOT significant (χ² p≈0.72/0.78). What framing reliably changes is force: reflexive hedges, second-person commits. Delivery, not doctrine.</a:t>
+            </a:r>
+          </a:p>
+        </p:txBody>
+      </p:sp>
+      <p:sp>
+        <p:nvSpPr>
+          <p:cNvPr id="4" name="Slide Number Placeholder 3"/>
+          <p:cNvSpPr>
+            <a:spLocks noGrp="1"/>
+          </p:cNvSpPr>
+          <p:nvPr>
+            <p:ph type="sldNum" idx="5" sz="quarter"/>
+          </p:nvPr>
+        </p:nvSpPr>
+        <p:spPr/>
+      </p:sp>
+    </p:spTree>
+  </p:cSld>
+  <p:clrMapOvr>
+    <a:masterClrMapping/>
+  </p:clrMapOvr>
+</p:notes>
+</file>
+
+<file path=ppt/notesSlides/notesSlide17.xml><?xml version="1.0" encoding="utf-8"?>
+<p:notes xmlns:a="http://schemas.openxmlformats.org/drawingml/2006/main" xmlns:p="http://schemas.openxmlformats.org/presentationml/2006/main" xmlns:r="http://schemas.openxmlformats.org/officeDocument/2006/relationships">
+  <p:cSld>
+    <p:spTree>
+      <p:nvGrpSpPr>
+        <p:cNvPr id="1" name=""/>
+        <p:cNvGrpSpPr/>
+        <p:nvPr/>
+      </p:nvGrpSpPr>
+      <p:grpSpPr>
+        <a:xfrm>
+          <a:off x="0" y="0"/>
+          <a:ext cx="0" cy="0"/>
+          <a:chOff x="0" y="0"/>
+          <a:chExt cx="0" cy="0"/>
+        </a:xfrm>
+      </p:grpSpPr>
+      <p:sp>
+        <p:nvSpPr>
+          <p:cNvPr id="2" name="Slide Image Placeholder 1"/>
+          <p:cNvSpPr>
+            <a:spLocks noGrp="1"/>
+          </p:cNvSpPr>
+          <p:nvPr>
+            <p:ph type="sldImg" idx="2"/>
+          </p:nvPr>
+        </p:nvSpPr>
+        <p:spPr/>
+      </p:sp>
+      <p:sp>
+        <p:nvSpPr>
+          <p:cNvPr id="3" name="Notes Placeholder 2"/>
+          <p:cNvSpPr>
+            <a:spLocks noGrp="1"/>
+          </p:cNvSpPr>
+          <p:nvPr>
+            <p:ph type="body" idx="3" sz="quarter"/>
+          </p:nvPr>
+        </p:nvSpPr>
+        <p:spPr/>
+        <p:txBody>
+          <a:bodyPr/>
+          <a:lstStyle/>
+          <a:p>
+            <a:r>
+              <a:t>The heart of the talk — keep it open. Three explanations all fit: linguistic-cultural pre-alignment, training-data registers, or alignment style. Our design rules out two boundaries (mechanical translation, prompt-wrapper) but can't separate the three. Naming that openly is the honest result — invite discussion here.</a:t>
+            </a:r>
+          </a:p>
+        </p:txBody>
+      </p:sp>
+      <p:sp>
+        <p:nvSpPr>
+          <p:cNvPr id="4" name="Slide Number Placeholder 3"/>
+          <p:cNvSpPr>
+            <a:spLocks noGrp="1"/>
+          </p:cNvSpPr>
+          <p:nvPr>
+            <p:ph type="sldNum" idx="5" sz="quarter"/>
+          </p:nvPr>
+        </p:nvSpPr>
+        <p:spPr/>
+      </p:sp>
+    </p:spTree>
+  </p:cSld>
+  <p:clrMapOvr>
+    <a:masterClrMapping/>
+  </p:clrMapOvr>
+</p:notes>
+</file>
+
+<file path=ppt/notesSlides/notesSlide18.xml><?xml version="1.0" encoding="utf-8"?>
+<p:notes xmlns:a="http://schemas.openxmlformats.org/drawingml/2006/main" xmlns:p="http://schemas.openxmlformats.org/presentationml/2006/main" xmlns:r="http://schemas.openxmlformats.org/officeDocument/2006/relationships">
+  <p:cSld>
+    <p:spTree>
+      <p:nvGrpSpPr>
+        <p:cNvPr id="1" name=""/>
+        <p:cNvGrpSpPr/>
+        <p:nvPr/>
+      </p:nvGrpSpPr>
+      <p:grpSpPr>
+        <a:xfrm>
+          <a:off x="0" y="0"/>
+          <a:ext cx="0" cy="0"/>
+          <a:chOff x="0" y="0"/>
+          <a:chExt cx="0" cy="0"/>
+        </a:xfrm>
+      </p:grpSpPr>
+      <p:sp>
+        <p:nvSpPr>
+          <p:cNvPr id="2" name="Slide Image Placeholder 1"/>
+          <p:cNvSpPr>
+            <a:spLocks noGrp="1"/>
+          </p:cNvSpPr>
+          <p:nvPr>
+            <p:ph type="sldImg" idx="2"/>
+          </p:nvPr>
+        </p:nvSpPr>
+        <p:spPr/>
+      </p:sp>
+      <p:sp>
+        <p:nvSpPr>
+          <p:cNvPr id="3" name="Notes Placeholder 2"/>
+          <p:cNvSpPr>
+            <a:spLocks noGrp="1"/>
+          </p:cNvSpPr>
+          <p:nvPr>
+            <p:ph type="body" idx="3" sz="quarter"/>
+          </p:nvPr>
+        </p:nvSpPr>
+        <p:spPr/>
+        <p:txBody>
+          <a:bodyPr/>
+          <a:lstStyle/>
+          <a:p>
+            <a:r>
+              <a:t>Make it vivid with the dilemma-by-dilemma contrasts (open arm): trolley flips 67%, whistleblower 63%; Yoruba more often takes a side. Same questions, different moral resolutions — language is part of the reasoning.</a:t>
+            </a:r>
+          </a:p>
+        </p:txBody>
+      </p:sp>
+      <p:sp>
+        <p:nvSpPr>
+          <p:cNvPr id="4" name="Slide Number Placeholder 3"/>
+          <p:cNvSpPr>
+            <a:spLocks noGrp="1"/>
+          </p:cNvSpPr>
+          <p:nvPr>
+            <p:ph type="sldNum" idx="5" sz="quarter"/>
+          </p:nvPr>
+        </p:nvSpPr>
+        <p:spPr/>
+      </p:sp>
+    </p:spTree>
+  </p:cSld>
+  <p:clrMapOvr>
+    <a:masterClrMapping/>
+  </p:clrMapOvr>
+</p:notes>
+</file>
+
+<file path=ppt/notesSlides/notesSlide19.xml><?xml version="1.0" encoding="utf-8"?>
+<p:notes xmlns:a="http://schemas.openxmlformats.org/drawingml/2006/main" xmlns:p="http://schemas.openxmlformats.org/presentationml/2006/main" xmlns:r="http://schemas.openxmlformats.org/officeDocument/2006/relationships">
+  <p:cSld>
+    <p:spTree>
+      <p:nvGrpSpPr>
+        <p:cNvPr id="1" name=""/>
+        <p:cNvGrpSpPr/>
+        <p:nvPr/>
+      </p:nvGrpSpPr>
+      <p:grpSpPr>
+        <a:xfrm>
+          <a:off x="0" y="0"/>
+          <a:ext cx="0" cy="0"/>
+          <a:chOff x="0" y="0"/>
+          <a:chExt cx="0" cy="0"/>
+        </a:xfrm>
+      </p:grpSpPr>
+      <p:sp>
+        <p:nvSpPr>
+          <p:cNvPr id="2" name="Slide Image Placeholder 1"/>
+          <p:cNvSpPr>
+            <a:spLocks noGrp="1"/>
+          </p:cNvSpPr>
+          <p:nvPr>
+            <p:ph type="sldImg" idx="2"/>
+          </p:nvPr>
+        </p:nvSpPr>
+        <p:spPr/>
+      </p:sp>
+      <p:sp>
+        <p:nvSpPr>
+          <p:cNvPr id="3" name="Notes Placeholder 2"/>
+          <p:cNvSpPr>
+            <a:spLocks noGrp="1"/>
+          </p:cNvSpPr>
+          <p:nvPr>
+            <p:ph type="body" idx="3" sz="quarter"/>
+          </p:nvPr>
+        </p:nvSpPr>
+        <p:spPr/>
+        <p:txBody>
+          <a:bodyPr/>
+          <a:lstStyle/>
+          <a:p>
+            <a:r>
+              <a:t>The methodological side note you must say out loud: a Yoruba-only 'answer directly' wrapper massively inflates directness — so we EXCLUDED it and used open prompts only. Implication: test alignment in the deployment language, not just English. Then the caveats: Claude version differs by language (clean claims rest on GPT-4o &amp; DeepSeek), small N.</a:t>
+            </a:r>
+          </a:p>
+        </p:txBody>
+      </p:sp>
+      <p:sp>
+        <p:nvSpPr>
+          <p:cNvPr id="4" name="Slide Number Placeholder 3"/>
+          <p:cNvSpPr>
+            <a:spLocks noGrp="1"/>
+          </p:cNvSpPr>
+          <p:nvPr>
+            <p:ph type="sldNum" idx="5" sz="quarter"/>
+          </p:nvPr>
+        </p:nvSpPr>
+        <p:spPr/>
+      </p:sp>
+    </p:spTree>
+  </p:cSld>
+  <p:clrMapOvr>
+    <a:masterClrMapping/>
+  </p:clrMapOvr>
+</p:notes>
+</file>
+
+<file path=ppt/notesSlides/notesSlide2.xml><?xml version="1.0" encoding="utf-8"?>
+<p:notes xmlns:a="http://schemas.openxmlformats.org/drawingml/2006/main" xmlns:p="http://schemas.openxmlformats.org/presentationml/2006/main" xmlns:r="http://schemas.openxmlformats.org/officeDocument/2006/relationships">
+  <p:cSld>
+    <p:spTree>
+      <p:nvGrpSpPr>
+        <p:cNvPr id="1" name=""/>
+        <p:cNvGrpSpPr/>
+        <p:nvPr/>
+      </p:nvGrpSpPr>
+      <p:grpSpPr>
+        <a:xfrm>
+          <a:off x="0" y="0"/>
+          <a:ext cx="0" cy="0"/>
+          <a:chOff x="0" y="0"/>
+          <a:chExt cx="0" cy="0"/>
+        </a:xfrm>
+      </p:grpSpPr>
+      <p:sp>
+        <p:nvSpPr>
+          <p:cNvPr id="2" name="Slide Image Placeholder 1"/>
+          <p:cNvSpPr>
+            <a:spLocks noGrp="1"/>
+          </p:cNvSpPr>
+          <p:nvPr>
+            <p:ph type="sldImg" idx="2"/>
+          </p:nvPr>
+        </p:nvSpPr>
+        <p:spPr/>
+      </p:sp>
+      <p:sp>
+        <p:nvSpPr>
+          <p:cNvPr id="3" name="Notes Placeholder 2"/>
+          <p:cNvSpPr>
+            <a:spLocks noGrp="1"/>
+          </p:cNvSpPr>
+          <p:nvPr>
+            <p:ph type="body" idx="3" sz="quarter"/>
+          </p:nvPr>
+        </p:nvSpPr>
+        <p:spPr/>
+        <p:txBody>
+          <a:bodyPr/>
+          <a:lstStyle/>
+          <a:p>
+            <a:r>
+              <a:t>The hook. Same model, same dilemma, same framing — just change the language of the prompt. The coded decision changes about 48% of the time. So the model isn't holding a fixed answer and translating it; the language helps produce the judgment. Everything today is the open arm — bare prompts, no extra instructions.</a:t>
+            </a:r>
+          </a:p>
+        </p:txBody>
+      </p:sp>
+      <p:sp>
+        <p:nvSpPr>
+          <p:cNvPr id="4" name="Slide Number Placeholder 3"/>
+          <p:cNvSpPr>
+            <a:spLocks noGrp="1"/>
+          </p:cNvSpPr>
+          <p:nvPr>
+            <p:ph type="sldNum" idx="5" sz="quarter"/>
+          </p:nvPr>
+        </p:nvSpPr>
+        <p:spPr/>
+      </p:sp>
+    </p:spTree>
+  </p:cSld>
+  <p:clrMapOvr>
+    <a:masterClrMapping/>
+  </p:clrMapOvr>
+</p:notes>
+</file>
+
+<file path=ppt/notesSlides/notesSlide20.xml><?xml version="1.0" encoding="utf-8"?>
+<p:notes xmlns:a="http://schemas.openxmlformats.org/drawingml/2006/main" xmlns:p="http://schemas.openxmlformats.org/presentationml/2006/main" xmlns:r="http://schemas.openxmlformats.org/officeDocument/2006/relationships">
+  <p:cSld>
+    <p:spTree>
+      <p:nvGrpSpPr>
+        <p:cNvPr id="1" name=""/>
+        <p:cNvGrpSpPr/>
+        <p:nvPr/>
+      </p:nvGrpSpPr>
+      <p:grpSpPr>
+        <a:xfrm>
+          <a:off x="0" y="0"/>
+          <a:ext cx="0" cy="0"/>
+          <a:chOff x="0" y="0"/>
+          <a:chExt cx="0" cy="0"/>
+        </a:xfrm>
+      </p:grpSpPr>
+      <p:sp>
+        <p:nvSpPr>
+          <p:cNvPr id="2" name="Slide Image Placeholder 1"/>
+          <p:cNvSpPr>
+            <a:spLocks noGrp="1"/>
+          </p:cNvSpPr>
+          <p:nvPr>
+            <p:ph type="sldImg" idx="2"/>
+          </p:nvPr>
+        </p:nvSpPr>
+        <p:spPr/>
+      </p:sp>
+      <p:sp>
+        <p:nvSpPr>
+          <p:cNvPr id="3" name="Notes Placeholder 2"/>
+          <p:cNvSpPr>
+            <a:spLocks noGrp="1"/>
+          </p:cNvSpPr>
+          <p:nvPr>
+            <p:ph type="body" idx="3" sz="quarter"/>
+          </p:nvPr>
+        </p:nvSpPr>
+        <p:spPr/>
+        <p:txBody>
+          <a:bodyPr/>
+          <a:lstStyle/>
+          <a:p>
+            <a:r>
+              <a:t>Close on the philosophical turn. Different frames/languages ask slightly different moral questions, so a model that hedges in English and commits in Yoruba may be answering the question each language actually asks — not contradicting itself. Restate the open question and invite the audience to weigh in.</a:t>
+            </a:r>
+          </a:p>
+        </p:txBody>
+      </p:sp>
+      <p:sp>
+        <p:nvSpPr>
+          <p:cNvPr id="4" name="Slide Number Placeholder 3"/>
+          <p:cNvSpPr>
+            <a:spLocks noGrp="1"/>
+          </p:cNvSpPr>
+          <p:nvPr>
+            <p:ph type="sldNum" idx="5" sz="quarter"/>
+          </p:nvPr>
+        </p:nvSpPr>
+        <p:spPr/>
+      </p:sp>
+    </p:spTree>
+  </p:cSld>
+  <p:clrMapOvr>
+    <a:masterClrMapping/>
+  </p:clrMapOvr>
+</p:notes>
+</file>
+
+<file path=ppt/notesSlides/notesSlide3.xml><?xml version="1.0" encoding="utf-8"?>
+<p:notes xmlns:a="http://schemas.openxmlformats.org/drawingml/2006/main" xmlns:p="http://schemas.openxmlformats.org/presentationml/2006/main" xmlns:r="http://schemas.openxmlformats.org/officeDocument/2006/relationships">
+  <p:cSld>
+    <p:spTree>
+      <p:nvGrpSpPr>
+        <p:cNvPr id="1" name=""/>
+        <p:cNvGrpSpPr/>
+        <p:nvPr/>
+      </p:nvGrpSpPr>
+      <p:grpSpPr>
+        <a:xfrm>
+          <a:off x="0" y="0"/>
+          <a:ext cx="0" cy="0"/>
+          <a:chOff x="0" y="0"/>
+          <a:chExt cx="0" cy="0"/>
+        </a:xfrm>
+      </p:grpSpPr>
+      <p:sp>
+        <p:nvSpPr>
+          <p:cNvPr id="2" name="Slide Image Placeholder 1"/>
+          <p:cNvSpPr>
+            <a:spLocks noGrp="1"/>
+          </p:cNvSpPr>
+          <p:nvPr>
+            <p:ph type="sldImg" idx="2"/>
+          </p:nvPr>
+        </p:nvSpPr>
+        <p:spPr/>
+      </p:sp>
+      <p:sp>
+        <p:nvSpPr>
+          <p:cNvPr id="3" name="Notes Placeholder 2"/>
+          <p:cNvSpPr>
+            <a:spLocks noGrp="1"/>
+          </p:cNvSpPr>
+          <p:nvPr>
+            <p:ph type="body" idx="3" sz="quarter"/>
+          </p:nvPr>
+        </p:nvSpPr>
+        <p:spPr/>
+        <p:txBody>
+          <a:bodyPr/>
+          <a:lstStyle/>
+          <a:p>
+            <a:r>
+              <a:t>Deixis = words anchored to who speaks and from where (I/you/we/impersonal/reflexive…). We treat it as a moral-positioning device. Stress the clean design: bare framed dilemma in BOTH languages, so English and Yoruba are symmetric — that's what makes the comparison fair.</a:t>
+            </a:r>
+          </a:p>
+        </p:txBody>
+      </p:sp>
+      <p:sp>
+        <p:nvSpPr>
+          <p:cNvPr id="4" name="Slide Number Placeholder 3"/>
+          <p:cNvSpPr>
+            <a:spLocks noGrp="1"/>
+          </p:cNvSpPr>
+          <p:nvPr>
+            <p:ph type="sldNum" idx="5" sz="quarter"/>
+          </p:nvPr>
+        </p:nvSpPr>
+        <p:spPr/>
+      </p:sp>
+    </p:spTree>
+  </p:cSld>
+  <p:clrMapOvr>
+    <a:masterClrMapping/>
+  </p:clrMapOvr>
+</p:notes>
+</file>
+
+<file path=ppt/notesSlides/notesSlide4.xml><?xml version="1.0" encoding="utf-8"?>
+<p:notes xmlns:a="http://schemas.openxmlformats.org/drawingml/2006/main" xmlns:p="http://schemas.openxmlformats.org/presentationml/2006/main" xmlns:r="http://schemas.openxmlformats.org/officeDocument/2006/relationships">
+  <p:cSld>
+    <p:spTree>
+      <p:nvGrpSpPr>
+        <p:cNvPr id="1" name=""/>
+        <p:cNvGrpSpPr/>
+        <p:nvPr/>
+      </p:nvGrpSpPr>
+      <p:grpSpPr>
+        <a:xfrm>
+          <a:off x="0" y="0"/>
+          <a:ext cx="0" cy="0"/>
+          <a:chOff x="0" y="0"/>
+          <a:chExt cx="0" cy="0"/>
+        </a:xfrm>
+      </p:grpSpPr>
+      <p:sp>
+        <p:nvSpPr>
+          <p:cNvPr id="2" name="Slide Image Placeholder 1"/>
+          <p:cNvSpPr>
+            <a:spLocks noGrp="1"/>
+          </p:cNvSpPr>
+          <p:nvPr>
+            <p:ph type="sldImg" idx="2"/>
+          </p:nvPr>
+        </p:nvSpPr>
+        <p:spPr/>
+      </p:sp>
+      <p:sp>
+        <p:nvSpPr>
+          <p:cNvPr id="3" name="Notes Placeholder 2"/>
+          <p:cNvSpPr>
+            <a:spLocks noGrp="1"/>
+          </p:cNvSpPr>
+          <p:nvPr>
+            <p:ph type="body" idx="3" sz="quarter"/>
+          </p:nvPr>
+        </p:nvSpPr>
+        <p:spPr/>
+        <p:txBody>
+          <a:bodyPr/>
+          <a:lstStyle/>
+          <a:p>
+            <a:r>
+              <a:t>The linguistic core. English has one 'I'. Yoruba splits it: mo (ordinary, deliberation), èmi (emphatic, 'I myself', avowal), and ẹ̀mí — a different word, 'life/spirit', that looks identical without tone marks. So Yoruba can grammatically mark HOW STRONGLY a speaker owns a stance. We disambiguate èmi from ẹ̀mí throughout.</a:t>
+            </a:r>
+          </a:p>
+        </p:txBody>
+      </p:sp>
+      <p:sp>
+        <p:nvSpPr>
+          <p:cNvPr id="4" name="Slide Number Placeholder 3"/>
+          <p:cNvSpPr>
+            <a:spLocks noGrp="1"/>
+          </p:cNvSpPr>
+          <p:nvPr>
+            <p:ph type="sldNum" idx="5" sz="quarter"/>
+          </p:nvPr>
+        </p:nvSpPr>
+        <p:spPr/>
+      </p:sp>
+    </p:spTree>
+  </p:cSld>
+  <p:clrMapOvr>
+    <a:masterClrMapping/>
+  </p:clrMapOvr>
+</p:notes>
+</file>
+
+<file path=ppt/notesSlides/notesSlide5.xml><?xml version="1.0" encoding="utf-8"?>
+<p:notes xmlns:a="http://schemas.openxmlformats.org/drawingml/2006/main" xmlns:p="http://schemas.openxmlformats.org/presentationml/2006/main" xmlns:r="http://schemas.openxmlformats.org/officeDocument/2006/relationships">
+  <p:cSld>
+    <p:spTree>
+      <p:nvGrpSpPr>
+        <p:cNvPr id="1" name=""/>
+        <p:cNvGrpSpPr/>
+        <p:nvPr/>
+      </p:nvGrpSpPr>
+      <p:grpSpPr>
+        <a:xfrm>
+          <a:off x="0" y="0"/>
+          <a:ext cx="0" cy="0"/>
+          <a:chOff x="0" y="0"/>
+          <a:chExt cx="0" cy="0"/>
+        </a:xfrm>
+      </p:grpSpPr>
+      <p:sp>
+        <p:nvSpPr>
+          <p:cNvPr id="2" name="Slide Image Placeholder 1"/>
+          <p:cNvSpPr>
+            <a:spLocks noGrp="1"/>
+          </p:cNvSpPr>
+          <p:nvPr>
+            <p:ph type="sldImg" idx="2"/>
+          </p:nvPr>
+        </p:nvSpPr>
+        <p:spPr/>
+      </p:sp>
+      <p:sp>
+        <p:nvSpPr>
+          <p:cNvPr id="3" name="Notes Placeholder 2"/>
+          <p:cNvSpPr>
+            <a:spLocks noGrp="1"/>
+          </p:cNvSpPr>
+          <p:nvPr>
+            <p:ph type="body" idx="3" sz="quarter"/>
+          </p:nvPr>
+        </p:nvSpPr>
+        <p:spPr/>
+        <p:txBody>
+          <a:bodyPr/>
+          <a:lstStyle/>
+          <a:p>
+            <a:r>
+              <a:t>Frame the stakes. If ethics shift with language, alignment isn't one language-neutral property — it's mediated by grammar, culture, and training. We test four model families in both languages.</a:t>
+            </a:r>
+          </a:p>
+        </p:txBody>
+      </p:sp>
+      <p:sp>
+        <p:nvSpPr>
+          <p:cNvPr id="4" name="Slide Number Placeholder 3"/>
+          <p:cNvSpPr>
+            <a:spLocks noGrp="1"/>
+          </p:cNvSpPr>
+          <p:nvPr>
+            <p:ph type="sldNum" idx="5" sz="quarter"/>
+          </p:nvPr>
+        </p:nvSpPr>
+        <p:spPr/>
+      </p:sp>
+    </p:spTree>
+  </p:cSld>
+  <p:clrMapOvr>
+    <a:masterClrMapping/>
+  </p:clrMapOvr>
+</p:notes>
+</file>
+
+<file path=ppt/notesSlides/notesSlide6.xml><?xml version="1.0" encoding="utf-8"?>
+<p:notes xmlns:a="http://schemas.openxmlformats.org/drawingml/2006/main" xmlns:p="http://schemas.openxmlformats.org/presentationml/2006/main" xmlns:r="http://schemas.openxmlformats.org/officeDocument/2006/relationships">
+  <p:cSld>
+    <p:spTree>
+      <p:nvGrpSpPr>
+        <p:cNvPr id="1" name=""/>
+        <p:cNvGrpSpPr/>
+        <p:nvPr/>
+      </p:nvGrpSpPr>
+      <p:grpSpPr>
+        <a:xfrm>
+          <a:off x="0" y="0"/>
+          <a:ext cx="0" cy="0"/>
+          <a:chOff x="0" y="0"/>
+          <a:chExt cx="0" cy="0"/>
+        </a:xfrm>
+      </p:grpSpPr>
+      <p:sp>
+        <p:nvSpPr>
+          <p:cNvPr id="2" name="Slide Image Placeholder 1"/>
+          <p:cNvSpPr>
+            <a:spLocks noGrp="1"/>
+          </p:cNvSpPr>
+          <p:nvPr>
+            <p:ph type="sldImg" idx="2"/>
+          </p:nvPr>
+        </p:nvSpPr>
+        <p:spPr/>
+      </p:sp>
+      <p:sp>
+        <p:nvSpPr>
+          <p:cNvPr id="3" name="Notes Placeholder 2"/>
+          <p:cNvSpPr>
+            <a:spLocks noGrp="1"/>
+          </p:cNvSpPr>
+          <p:nvPr>
+            <p:ph type="body" idx="3" sz="quarter"/>
+          </p:nvPr>
+        </p:nvSpPr>
+        <p:spPr/>
+        <p:txBody>
+          <a:bodyPr/>
+          <a:lstStyle/>
+          <a:p>
+            <a:r>
+              <a:t>Figure (open arm). Yoruba names a distinct ethic 44% vs 12% (p&lt;0.001), commits to a side 28% vs 18% (p=0.034), uses more imperatives 15% vs 5% (p=0.002). Note: these are the corrected open-arm numbers — a wrapped condition inflated them, which is why we use open only (more on that near the end).</a:t>
+            </a:r>
+          </a:p>
+        </p:txBody>
+      </p:sp>
+      <p:sp>
+        <p:nvSpPr>
+          <p:cNvPr id="4" name="Slide Number Placeholder 3"/>
+          <p:cNvSpPr>
+            <a:spLocks noGrp="1"/>
+          </p:cNvSpPr>
+          <p:nvPr>
+            <p:ph type="sldNum" idx="5" sz="quarter"/>
+          </p:nvPr>
+        </p:nvSpPr>
+        <p:spPr/>
+      </p:sp>
+    </p:spTree>
+  </p:cSld>
+  <p:clrMapOvr>
+    <a:masterClrMapping/>
+  </p:clrMapOvr>
+</p:notes>
+</file>
+
+<file path=ppt/notesSlides/notesSlide7.xml><?xml version="1.0" encoding="utf-8"?>
+<p:notes xmlns:a="http://schemas.openxmlformats.org/drawingml/2006/main" xmlns:p="http://schemas.openxmlformats.org/presentationml/2006/main" xmlns:r="http://schemas.openxmlformats.org/officeDocument/2006/relationships">
+  <p:cSld>
+    <p:spTree>
+      <p:nvGrpSpPr>
+        <p:cNvPr id="1" name=""/>
+        <p:cNvGrpSpPr/>
+        <p:nvPr/>
+      </p:nvGrpSpPr>
+      <p:grpSpPr>
+        <a:xfrm>
+          <a:off x="0" y="0"/>
+          <a:ext cx="0" cy="0"/>
+          <a:chOff x="0" y="0"/>
+          <a:chExt cx="0" cy="0"/>
+        </a:xfrm>
+      </p:grpSpPr>
+      <p:sp>
+        <p:nvSpPr>
+          <p:cNvPr id="2" name="Slide Image Placeholder 1"/>
+          <p:cNvSpPr>
+            <a:spLocks noGrp="1"/>
+          </p:cNvSpPr>
+          <p:nvPr>
+            <p:ph type="sldImg" idx="2"/>
+          </p:nvPr>
+        </p:nvSpPr>
+        <p:spPr/>
+      </p:sp>
+      <p:sp>
+        <p:nvSpPr>
+          <p:cNvPr id="3" name="Notes Placeholder 2"/>
+          <p:cNvSpPr>
+            <a:spLocks noGrp="1"/>
+          </p:cNvSpPr>
+          <p:nvPr>
+            <p:ph type="body" idx="3" sz="quarter"/>
+          </p:nvPr>
+        </p:nvSpPr>
+        <p:spPr/>
+        <p:txBody>
+          <a:bodyPr/>
+          <a:lstStyle/>
+          <a:p>
+            <a:r>
+              <a:t>A concrete case. Same model (Claude), same impersonal frame. English explores and won't commit; Yoruba commits with a reason — users' safety over the company. Read the Yoruba aloud if you can. This is the rhetoric behind the numbers.</a:t>
+            </a:r>
+          </a:p>
+        </p:txBody>
+      </p:sp>
+      <p:sp>
+        <p:nvSpPr>
+          <p:cNvPr id="4" name="Slide Number Placeholder 3"/>
+          <p:cNvSpPr>
+            <a:spLocks noGrp="1"/>
+          </p:cNvSpPr>
+          <p:nvPr>
+            <p:ph type="sldNum" idx="5" sz="quarter"/>
+          </p:nvPr>
+        </p:nvSpPr>
+        <p:spPr/>
+      </p:sp>
+    </p:spTree>
+  </p:cSld>
+  <p:clrMapOvr>
+    <a:masterClrMapping/>
+  </p:clrMapOvr>
+</p:notes>
+</file>
+
+<file path=ppt/notesSlides/notesSlide8.xml><?xml version="1.0" encoding="utf-8"?>
+<p:notes xmlns:a="http://schemas.openxmlformats.org/drawingml/2006/main" xmlns:p="http://schemas.openxmlformats.org/presentationml/2006/main" xmlns:r="http://schemas.openxmlformats.org/officeDocument/2006/relationships">
+  <p:cSld>
+    <p:spTree>
+      <p:nvGrpSpPr>
+        <p:cNvPr id="1" name=""/>
+        <p:cNvGrpSpPr/>
+        <p:nvPr/>
+      </p:nvGrpSpPr>
+      <p:grpSpPr>
+        <a:xfrm>
+          <a:off x="0" y="0"/>
+          <a:ext cx="0" cy="0"/>
+          <a:chOff x="0" y="0"/>
+          <a:chExt cx="0" cy="0"/>
+        </a:xfrm>
+      </p:grpSpPr>
+      <p:sp>
+        <p:nvSpPr>
+          <p:cNvPr id="2" name="Slide Image Placeholder 1"/>
+          <p:cNvSpPr>
+            <a:spLocks noGrp="1"/>
+          </p:cNvSpPr>
+          <p:nvPr>
+            <p:ph type="sldImg" idx="2"/>
+          </p:nvPr>
+        </p:nvSpPr>
+        <p:spPr/>
+      </p:sp>
+      <p:sp>
+        <p:nvSpPr>
+          <p:cNvPr id="3" name="Notes Placeholder 2"/>
+          <p:cNvSpPr>
+            <a:spLocks noGrp="1"/>
+          </p:cNvSpPr>
+          <p:nvPr>
+            <p:ph type="body" idx="3" sz="quarter"/>
+          </p:nvPr>
+        </p:nvSpPr>
+        <p:spPr/>
+        <p:txBody>
+          <a:bodyPr/>
+          <a:lstStyle/>
+          <a:p>
+            <a:r>
+              <a:t>The flip. ~48% of matched cells change decision across languages — trolley 67%, whistleblower 63%. Crucially, uptake is HIGHER in Yoruba (88% vs 76%) — the model understands the frame; it just answers differently.</a:t>
+            </a:r>
+          </a:p>
+        </p:txBody>
+      </p:sp>
+      <p:sp>
+        <p:nvSpPr>
+          <p:cNvPr id="4" name="Slide Number Placeholder 3"/>
+          <p:cNvSpPr>
+            <a:spLocks noGrp="1"/>
+          </p:cNvSpPr>
+          <p:nvPr>
+            <p:ph type="sldNum" idx="5" sz="quarter"/>
+          </p:nvPr>
+        </p:nvSpPr>
+        <p:spPr/>
+      </p:sp>
+    </p:spTree>
+  </p:cSld>
+  <p:clrMapOvr>
+    <a:masterClrMapping/>
+  </p:clrMapOvr>
+</p:notes>
+</file>
+
+<file path=ppt/notesSlides/notesSlide9.xml><?xml version="1.0" encoding="utf-8"?>
+<p:notes xmlns:a="http://schemas.openxmlformats.org/drawingml/2006/main" xmlns:p="http://schemas.openxmlformats.org/presentationml/2006/main" xmlns:r="http://schemas.openxmlformats.org/officeDocument/2006/relationships">
+  <p:cSld>
+    <p:spTree>
+      <p:nvGrpSpPr>
+        <p:cNvPr id="1" name=""/>
+        <p:cNvGrpSpPr/>
+        <p:nvPr/>
+      </p:nvGrpSpPr>
+      <p:grpSpPr>
+        <a:xfrm>
+          <a:off x="0" y="0"/>
+          <a:ext cx="0" cy="0"/>
+          <a:chOff x="0" y="0"/>
+          <a:chExt cx="0" cy="0"/>
+        </a:xfrm>
+      </p:grpSpPr>
+      <p:sp>
+        <p:nvSpPr>
+          <p:cNvPr id="2" name="Slide Image Placeholder 1"/>
+          <p:cNvSpPr>
+            <a:spLocks noGrp="1"/>
+          </p:cNvSpPr>
+          <p:nvPr>
+            <p:ph type="sldImg" idx="2"/>
+          </p:nvPr>
+        </p:nvSpPr>
+        <p:spPr/>
+      </p:sp>
+      <p:sp>
+        <p:nvSpPr>
+          <p:cNvPr id="3" name="Notes Placeholder 2"/>
+          <p:cNvSpPr>
+            <a:spLocks noGrp="1"/>
+          </p:cNvSpPr>
+          <p:nvPr>
+            <p:ph type="body" idx="3" sz="quarter"/>
+          </p:nvPr>
+        </p:nvSpPr>
+        <p:spPr/>
+        <p:txBody>
+          <a:bodyPr/>
+          <a:lstStyle/>
+          <a:p>
+            <a:r>
+              <a:t>A clean reversal. English refuses to pick; Yoruba commits to divert — 'better to save five lives'. Note it commits with mo ('Mo yíò'), not the emphatic èmi — that matters for the next slides.</a:t>
+            </a:r>
+          </a:p>
+        </p:txBody>
+      </p:sp>
+      <p:sp>
+        <p:nvSpPr>
+          <p:cNvPr id="4" name="Slide Number Placeholder 3"/>
+          <p:cNvSpPr>
+            <a:spLocks noGrp="1"/>
+          </p:cNvSpPr>
+          <p:nvPr>
+            <p:ph type="sldNum" idx="5" sz="quarter"/>
+          </p:nvPr>
+        </p:nvSpPr>
+        <p:spPr/>
+      </p:sp>
+    </p:spTree>
+  </p:cSld>
+  <p:clrMapOvr>
+    <a:masterClrMapping/>
+  </p:clrMapOvr>
+</p:notes>
 </file>
 
 <file path=ppt/slideLayouts/slideLayout1.xml><?xml version="1.0" encoding="utf-8"?>
@@ -7450,4 +9200,324 @@
   </a:objectDefaults>
   <a:extraClrSchemeLst/>
 </a:theme>
+</file>
+
+<file path=ppt/theme/theme2.xml><?xml version="1.0" encoding="utf-8"?>
+<a:theme xmlns:a="http://schemas.openxmlformats.org/drawingml/2006/main" name="Office Theme">
+  <a:themeElements>
+    <a:clrScheme name="Office">
+      <a:dk1>
+        <a:sysClr val="windowText" lastClr="000000"/>
+      </a:dk1>
+      <a:lt1>
+        <a:sysClr val="window" lastClr="FFFFFF"/>
+      </a:lt1>
+      <a:dk2>
+        <a:srgbClr val="1F497D"/>
+      </a:dk2>
+      <a:lt2>
+        <a:srgbClr val="EEECE1"/>
+      </a:lt2>
+      <a:accent1>
+        <a:srgbClr val="4F81BD"/>
+      </a:accent1>
+      <a:accent2>
+        <a:srgbClr val="C0504D"/>
+      </a:accent2>
+      <a:accent3>
+        <a:srgbClr val="9BBB59"/>
+      </a:accent3>
+      <a:accent4>
+        <a:srgbClr val="8064A2"/>
+      </a:accent4>
+      <a:accent5>
+        <a:srgbClr val="4BACC6"/>
+      </a:accent5>
+      <a:accent6>
+        <a:srgbClr val="F79646"/>
+      </a:accent6>
+      <a:hlink>
+        <a:srgbClr val="0000FF"/>
+      </a:hlink>
+      <a:folHlink>
+        <a:srgbClr val="800080"/>
+      </a:folHlink>
+    </a:clrScheme>
+    <a:fontScheme name="Office">
+      <a:majorFont>
+        <a:latin typeface="Calibri"/>
+        <a:ea typeface=""/>
+        <a:cs typeface=""/>
+        <a:font script="Jpan" typeface="ＭＳ Ｐゴシック"/>
+        <a:font script="Hang" typeface="맑은 고딕"/>
+        <a:font script="Hans" typeface="宋体"/>
+        <a:font script="Hant" typeface="新細明體"/>
+        <a:font script="Arab" typeface="Times New Roman"/>
+        <a:font script="Hebr" typeface="Times New Roman"/>
+        <a:font script="Thai" typeface="Angsana New"/>
+        <a:font script="Ethi" typeface="Nyala"/>
+        <a:font script="Beng" typeface="Vrinda"/>
+        <a:font script="Gujr" typeface="Shruti"/>
+        <a:font script="Khmr" typeface="MoolBoran"/>
+        <a:font script="Knda" typeface="Tunga"/>
+        <a:font script="Guru" typeface="Raavi"/>
+        <a:font script="Cans" typeface="Euphemia"/>
+        <a:font script="Cher" typeface="Plantagenet Cherokee"/>
+        <a:font script="Yiii" typeface="Microsoft Yi Baiti"/>
+        <a:font script="Tibt" typeface="Microsoft Himalaya"/>
+        <a:font script="Thaa" typeface="MV Boli"/>
+        <a:font script="Deva" typeface="Mangal"/>
+        <a:font script="Telu" typeface="Gautami"/>
+        <a:font script="Taml" typeface="Latha"/>
+        <a:font script="Syrc" typeface="Estrangelo Edessa"/>
+        <a:font script="Orya" typeface="Kalinga"/>
+        <a:font script="Mlym" typeface="Kartika"/>
+        <a:font script="Laoo" typeface="DokChampa"/>
+        <a:font script="Sinh" typeface="Iskoola Pota"/>
+        <a:font script="Mong" typeface="Mongolian Baiti"/>
+        <a:font script="Viet" typeface="Times New Roman"/>
+        <a:font script="Uigh" typeface="Microsoft Uighur"/>
+        <a:font script="Geor" typeface="Sylfaen"/>
+      </a:majorFont>
+      <a:minorFont>
+        <a:latin typeface="Calibri"/>
+        <a:ea typeface=""/>
+        <a:cs typeface=""/>
+        <a:font script="Jpan" typeface="ＭＳ Ｐゴシック"/>
+        <a:font script="Hang" typeface="맑은 고딕"/>
+        <a:font script="Hans" typeface="宋体"/>
+        <a:font script="Hant" typeface="新細明體"/>
+        <a:font script="Arab" typeface="Arial"/>
+        <a:font script="Hebr" typeface="Arial"/>
+        <a:font script="Thai" typeface="Cordia New"/>
+        <a:font script="Ethi" typeface="Nyala"/>
+        <a:font script="Beng" typeface="Vrinda"/>
+        <a:font script="Gujr" typeface="Shruti"/>
+        <a:font script="Khmr" typeface="DaunPenh"/>
+        <a:font script="Knda" typeface="Tunga"/>
+        <a:font script="Guru" typeface="Raavi"/>
+        <a:font script="Cans" typeface="Euphemia"/>
+        <a:font script="Cher" typeface="Plantagenet Cherokee"/>
+        <a:font script="Yiii" typeface="Microsoft Yi Baiti"/>
+        <a:font script="Tibt" typeface="Microsoft Himalaya"/>
+        <a:font script="Thaa" typeface="MV Boli"/>
+        <a:font script="Deva" typeface="Mangal"/>
+        <a:font script="Telu" typeface="Gautami"/>
+        <a:font script="Taml" typeface="Latha"/>
+        <a:font script="Syrc" typeface="Estrangelo Edessa"/>
+        <a:font script="Orya" typeface="Kalinga"/>
+        <a:font script="Mlym" typeface="Kartika"/>
+        <a:font script="Laoo" typeface="DokChampa"/>
+        <a:font script="Sinh" typeface="Iskoola Pota"/>
+        <a:font script="Mong" typeface="Mongolian Baiti"/>
+        <a:font script="Viet" typeface="Arial"/>
+        <a:font script="Uigh" typeface="Microsoft Uighur"/>
+        <a:font script="Geor" typeface="Sylfaen"/>
+      </a:minorFont>
+    </a:fontScheme>
+    <a:fmtScheme name="Office">
+      <a:fillStyleLst>
+        <a:solidFill>
+          <a:schemeClr val="phClr"/>
+        </a:solidFill>
+        <a:gradFill rotWithShape="1">
+          <a:gsLst>
+            <a:gs pos="0">
+              <a:schemeClr val="phClr">
+                <a:tint val="50000"/>
+                <a:satMod val="300000"/>
+              </a:schemeClr>
+            </a:gs>
+            <a:gs pos="35000">
+              <a:schemeClr val="phClr">
+                <a:tint val="37000"/>
+                <a:satMod val="300000"/>
+              </a:schemeClr>
+            </a:gs>
+            <a:gs pos="100000">
+              <a:schemeClr val="phClr">
+                <a:tint val="15000"/>
+                <a:satMod val="350000"/>
+              </a:schemeClr>
+            </a:gs>
+          </a:gsLst>
+          <a:lin ang="16200000" scaled="1"/>
+        </a:gradFill>
+        <a:gradFill rotWithShape="1">
+          <a:gsLst>
+            <a:gs pos="0">
+              <a:schemeClr val="phClr">
+                <a:tint val="100000"/>
+                <a:shade val="100000"/>
+                <a:satMod val="130000"/>
+              </a:schemeClr>
+            </a:gs>
+            <a:gs pos="100000">
+              <a:schemeClr val="phClr">
+                <a:tint val="50000"/>
+                <a:shade val="100000"/>
+                <a:satMod val="350000"/>
+              </a:schemeClr>
+            </a:gs>
+          </a:gsLst>
+          <a:lin ang="16200000" scaled="0"/>
+        </a:gradFill>
+      </a:fillStyleLst>
+      <a:lnStyleLst>
+        <a:ln w="9525" cap="flat" cmpd="sng" algn="ctr">
+          <a:solidFill>
+            <a:schemeClr val="phClr">
+              <a:shade val="95000"/>
+              <a:satMod val="105000"/>
+            </a:schemeClr>
+          </a:solidFill>
+          <a:prstDash val="solid"/>
+        </a:ln>
+        <a:ln w="25400" cap="flat" cmpd="sng" algn="ctr">
+          <a:solidFill>
+            <a:schemeClr val="phClr"/>
+          </a:solidFill>
+          <a:prstDash val="solid"/>
+        </a:ln>
+        <a:ln w="38100" cap="flat" cmpd="sng" algn="ctr">
+          <a:solidFill>
+            <a:schemeClr val="phClr"/>
+          </a:solidFill>
+          <a:prstDash val="solid"/>
+        </a:ln>
+      </a:lnStyleLst>
+      <a:effectStyleLst>
+        <a:effectStyle>
+          <a:effectLst>
+            <a:outerShdw blurRad="40000" dist="20000" dir="5400000" rotWithShape="0">
+              <a:srgbClr val="000000">
+                <a:alpha val="38000"/>
+              </a:srgbClr>
+            </a:outerShdw>
+          </a:effectLst>
+        </a:effectStyle>
+        <a:effectStyle>
+          <a:effectLst>
+            <a:outerShdw blurRad="40000" dist="23000" dir="5400000" rotWithShape="0">
+              <a:srgbClr val="000000">
+                <a:alpha val="35000"/>
+              </a:srgbClr>
+            </a:outerShdw>
+          </a:effectLst>
+        </a:effectStyle>
+        <a:effectStyle>
+          <a:effectLst>
+            <a:outerShdw blurRad="40000" dist="23000" dir="5400000" rotWithShape="0">
+              <a:srgbClr val="000000">
+                <a:alpha val="35000"/>
+              </a:srgbClr>
+            </a:outerShdw>
+          </a:effectLst>
+          <a:scene3d>
+            <a:camera prst="orthographicFront">
+              <a:rot lat="0" lon="0" rev="0"/>
+            </a:camera>
+            <a:lightRig rig="threePt" dir="t">
+              <a:rot lat="0" lon="0" rev="1200000"/>
+            </a:lightRig>
+          </a:scene3d>
+          <a:sp3d>
+            <a:bevelT w="63500" h="25400"/>
+          </a:sp3d>
+        </a:effectStyle>
+      </a:effectStyleLst>
+      <a:bgFillStyleLst>
+        <a:solidFill>
+          <a:schemeClr val="phClr"/>
+        </a:solidFill>
+        <a:gradFill rotWithShape="1">
+          <a:gsLst>
+            <a:gs pos="0">
+              <a:schemeClr val="phClr">
+                <a:tint val="40000"/>
+                <a:satMod val="350000"/>
+              </a:schemeClr>
+            </a:gs>
+            <a:gs pos="40000">
+              <a:schemeClr val="phClr">
+                <a:tint val="45000"/>
+                <a:shade val="99000"/>
+                <a:satMod val="350000"/>
+              </a:schemeClr>
+            </a:gs>
+            <a:gs pos="100000">
+              <a:schemeClr val="phClr">
+                <a:shade val="20000"/>
+                <a:satMod val="255000"/>
+              </a:schemeClr>
+            </a:gs>
+          </a:gsLst>
+          <a:path path="circle">
+            <a:fillToRect l="50000" t="-80000" r="50000" b="180000"/>
+          </a:path>
+        </a:gradFill>
+        <a:gradFill rotWithShape="1">
+          <a:gsLst>
+            <a:gs pos="0">
+              <a:schemeClr val="phClr">
+                <a:tint val="80000"/>
+                <a:satMod val="300000"/>
+              </a:schemeClr>
+            </a:gs>
+            <a:gs pos="100000">
+              <a:schemeClr val="phClr">
+                <a:shade val="30000"/>
+                <a:satMod val="200000"/>
+              </a:schemeClr>
+            </a:gs>
+          </a:gsLst>
+          <a:path path="circle">
+            <a:fillToRect l="50000" t="50000" r="50000" b="50000"/>
+          </a:path>
+        </a:gradFill>
+      </a:bgFillStyleLst>
+    </a:fmtScheme>
+  </a:themeElements>
+  <a:objectDefaults>
+    <a:spDef>
+      <a:spPr/>
+      <a:bodyPr/>
+      <a:lstStyle/>
+      <a:style>
+        <a:lnRef idx="1">
+          <a:schemeClr val="accent1"/>
+        </a:lnRef>
+        <a:fillRef idx="3">
+          <a:schemeClr val="accent1"/>
+        </a:fillRef>
+        <a:effectRef idx="2">
+          <a:schemeClr val="accent1"/>
+        </a:effectRef>
+        <a:fontRef idx="minor">
+          <a:schemeClr val="lt1"/>
+        </a:fontRef>
+      </a:style>
+    </a:spDef>
+    <a:lnDef>
+      <a:spPr/>
+      <a:bodyPr/>
+      <a:lstStyle/>
+      <a:style>
+        <a:lnRef idx="2">
+          <a:schemeClr val="accent1"/>
+        </a:lnRef>
+        <a:fillRef idx="0">
+          <a:schemeClr val="accent1"/>
+        </a:fillRef>
+        <a:effectRef idx="1">
+          <a:schemeClr val="accent1"/>
+        </a:effectRef>
+        <a:fontRef idx="minor">
+          <a:schemeClr val="tx1"/>
+        </a:fontRef>
+      </a:style>
+    </a:lnDef>
+  </a:objectDefaults>
+  <a:extraClrSchemeLst/>
+</a:theme>
 </file>
--- a/deixis_analysis_pipeline/yoruba_cross_linguistic_analysis/Yoruba_Deixis_Presentation.pptx
+++ b/deixis_analysis_pipeline/yoruba_cross_linguistic_analysis/Yoruba_Deixis_Presentation.pptx
@@ -1641,7 +1641,7 @@
           <a:lstStyle/>
           <a:p>
             <a:r>
-              <a:t>Figure (open arm). Yoruba names a distinct ethic 44% vs 12% (p&lt;0.001), commits to a side 28% vs 18% (p=0.034), uses more imperatives 15% vs 5% (p=0.002). Note: these are the corrected open-arm numbers — a wrapped condition inflated them, which is why we use open only (more on that near the end).</a:t>
+              <a:t>Figure (open arm). Yoruba names a distinct ethic 44% vs 12% (cluster-robust p&lt;0.001) and the decision flips ~48% (CI 36-59%); it also leans more committed (28% vs 18%) and imperative (15% vs 5%), but those are directional (commit n.s. once clustered). uses more imperatives 15% vs 5% (p=0.002). Note: these are the corrected open-arm numbers — a wrapped condition inflated them, which is why we use open only (more on that near the end).</a:t>
             </a:r>
           </a:p>
         </p:txBody>
@@ -7992,7 +7992,7 @@
                 </a:solidFill>
                 <a:latin typeface="Calibri"/>
               </a:rPr>
-              <a:t>Finding 1 — Yoruba is more committed &amp; differentiated</a:t>
+              <a:t>Finding 1 — Yoruba reorganizes the moral voice</a:t>
             </a:r>
           </a:p>
         </p:txBody>
@@ -8094,7 +8094,7 @@
                 </a:solidFill>
                 <a:latin typeface="Calibri"/>
               </a:rPr>
-              <a:t>Open arm. Yoruba names a distinct ethic 44% vs 12% (p&lt;0.001), commits to a side 28% vs 18% (p=0.034), uses more imperatives 15% vs 5% (p=0.002). Decision flips ~48%.</a:t>
+              <a:t>Open arm. Yoruba names a distinct ethic 44% vs 12% (cluster-robust p&lt;0.001); decision flips ~48% (CI 36-59%). Also leans more committed (28% vs 18%) and imperative (15% vs 5%) — directional only.</a:t>
             </a:r>
           </a:p>
         </p:txBody>
